--- a/BacPrep_Presentation.pptx
+++ b/BacPrep_Presentation.pptx
@@ -4,6 +4,9 @@
   <p:sldMasterIdLst>
     <p:sldMasterId id="2147483648" r:id="rId1"/>
   </p:sldMasterIdLst>
+  <p:notesMasterIdLst>
+    <p:notesMasterId r:id="rId17"/>
+  </p:notesMasterIdLst>
   <p:sldIdLst>
     <p:sldId id="256" r:id="rId2"/>
     <p:sldId id="257" r:id="rId3"/>
@@ -21,9 +24,6 @@
     <p:sldId id="269" r:id="rId15"/>
     <p:sldId id="270" r:id="rId16"/>
   </p:sldIdLst>
-  <p:notesMasterIdLst>
-    <p:notesMasterId r:id="rId17"/>
-  </p:notesMasterIdLst>
   <p:sldSz cx="12192000" cy="6858000"/>
   <p:notesSz cx="6858000" cy="12192000"/>
   <p:defaultTextStyle>
@@ -118,6 +118,11 @@
       </a:defRPr>
     </a:lvl9pPr>
   </p:defaultTextStyle>
+  <p:extLst>
+    <p:ext uri="{EFAFB233-063F-42B5-8137-9DF3F51BA10A}">
+      <p15:sldGuideLst xmlns:p15="http://schemas.microsoft.com/office/powerpoint/2012/main"/>
+    </p:ext>
+  </p:extLst>
 </p:presentation>
 </file>
 
@@ -143,234 +148,10 @@
           <a:chExt cx="0" cy="0"/>
         </a:xfrm>
       </p:grpSpPr>
-      <p:sp>
-        <p:nvSpPr>
-          <p:cNvPr id="2" name="Header Placeholder 1"/>
-          <p:cNvSpPr>
-            <a:spLocks noGrp="1"/>
-          </p:cNvSpPr>
-          <p:nvPr>
-            <p:ph type="hdr" sz="quarter"/>
-          </p:nvPr>
-        </p:nvSpPr>
-        <p:spPr>
-          <a:xfrm>
-            <a:off x="0" y="0"/>
-            <a:ext cx="2971800" cy="458788"/>
-          </a:xfrm>
-          <a:prstGeom prst="rect">
-            <a:avLst/>
-          </a:prstGeom>
-        </p:spPr>
-        <p:txBody>
-          <a:bodyPr vert="horz" lIns="91440" tIns="45720" rIns="91440" bIns="45720" rtlCol="0"/>
-          <a:lstStyle>
-            <a:lvl1pPr algn="l">
-              <a:defRPr sz="1200"/>
-            </a:lvl1pPr>
-          </a:lstStyle>
-          <a:p>
-            <a:endParaRPr lang="en-US"/>
-          </a:p>
-        </p:txBody>
-      </p:sp>
-      <p:sp>
-        <p:nvSpPr>
-          <p:cNvPr id="3" name="Date Placeholder 2"/>
-          <p:cNvSpPr>
-            <a:spLocks noGrp="1"/>
-          </p:cNvSpPr>
-          <p:nvPr>
-            <p:ph type="dt" idx="1"/>
-          </p:nvPr>
-        </p:nvSpPr>
-        <p:spPr>
-          <a:xfrm>
-            <a:off x="3884613" y="0"/>
-            <a:ext cx="2971800" cy="458788"/>
-          </a:xfrm>
-          <a:prstGeom prst="rect">
-            <a:avLst/>
-          </a:prstGeom>
-        </p:spPr>
-        <p:txBody>
-          <a:bodyPr vert="horz" lIns="91440" tIns="45720" rIns="91440" bIns="45720" rtlCol="0"/>
-          <a:lstStyle>
-            <a:lvl1pPr algn="r">
-              <a:defRPr sz="1200"/>
-            </a:lvl1pPr>
-          </a:lstStyle>
-          <a:p>
-            <a:fld id="{5282F153-3F37-0F45-9E97-73ACFA13230C}" type="datetimeFigureOut">
-              <a:rPr lang="en-US"/>
-              <a:t>7/23/19</a:t>
-            </a:fld>
-            <a:endParaRPr lang="en-US"/>
-          </a:p>
-        </p:txBody>
-      </p:sp>
-      <p:sp>
-        <p:nvSpPr>
-          <p:cNvPr id="4" name="Slide Image Placeholder 3"/>
-          <p:cNvSpPr>
-            <a:spLocks noGrp="1" noRot="1" noChangeAspect="1"/>
-          </p:cNvSpPr>
-          <p:nvPr>
-            <p:ph type="sldImg" idx="2"/>
-          </p:nvPr>
-        </p:nvSpPr>
-        <p:spPr>
-          <a:xfrm>
-            <a:off x="685800" y="1143000"/>
-            <a:ext cx="5486400" cy="3086100"/>
-          </a:xfrm>
-          <a:prstGeom prst="rect">
-            <a:avLst/>
-          </a:prstGeom>
-          <a:noFill/>
-          <a:ln w="12700">
-            <a:solidFill>
-              <a:prstClr val="black"/>
-            </a:solidFill>
-          </a:ln>
-        </p:spPr>
-        <p:txBody>
-          <a:bodyPr vert="horz" lIns="91440" tIns="45720" rIns="91440" bIns="45720" rtlCol="0" anchor="ctr"/>
-          <a:lstStyle/>
-          <a:p>
-            <a:endParaRPr lang="en-US"/>
-          </a:p>
-        </p:txBody>
-      </p:sp>
-      <p:sp>
-        <p:nvSpPr>
-          <p:cNvPr id="5" name="Notes Placeholder 4"/>
-          <p:cNvSpPr>
-            <a:spLocks noGrp="1"/>
-          </p:cNvSpPr>
-          <p:nvPr>
-            <p:ph type="body" sz="quarter" idx="3"/>
-          </p:nvPr>
-        </p:nvSpPr>
-        <p:spPr>
-          <a:xfrm>
-            <a:off x="685800" y="4400550"/>
-            <a:ext cx="5486400" cy="3600450"/>
-          </a:xfrm>
-          <a:prstGeom prst="rect">
-            <a:avLst/>
-          </a:prstGeom>
-        </p:spPr>
-        <p:txBody>
-          <a:bodyPr vert="horz" lIns="91440" tIns="45720" rIns="91440" bIns="45720" rtlCol="0"/>
-          <a:lstStyle/>
-          <a:p>
-            <a:pPr lvl="0"/>
-            <a:r>
-              <a:rPr lang="en-US"/>
-              <a:t>Click to edit Master text styles</a:t>
-            </a:r>
-          </a:p>
-          <a:p>
-            <a:pPr lvl="1"/>
-            <a:r>
-              <a:rPr lang="en-US"/>
-              <a:t>Second level</a:t>
-            </a:r>
-          </a:p>
-          <a:p>
-            <a:pPr lvl="2"/>
-            <a:r>
-              <a:rPr lang="en-US"/>
-              <a:t>Third level</a:t>
-            </a:r>
-          </a:p>
-          <a:p>
-            <a:pPr lvl="3"/>
-            <a:r>
-              <a:rPr lang="en-US"/>
-              <a:t>Fourth level</a:t>
-            </a:r>
-          </a:p>
-          <a:p>
-            <a:pPr lvl="4"/>
-            <a:r>
-              <a:rPr lang="en-US"/>
-              <a:t>Fifth level</a:t>
-            </a:r>
-          </a:p>
-        </p:txBody>
-      </p:sp>
-      <p:sp>
-        <p:nvSpPr>
-          <p:cNvPr id="6" name="Footer Placeholder 5"/>
-          <p:cNvSpPr>
-            <a:spLocks noGrp="1"/>
-          </p:cNvSpPr>
-          <p:nvPr>
-            <p:ph type="ftr" sz="quarter" idx="4"/>
-          </p:nvPr>
-        </p:nvSpPr>
-        <p:spPr>
-          <a:xfrm>
-            <a:off x="0" y="8685213"/>
-            <a:ext cx="2971800" cy="458787"/>
-          </a:xfrm>
-          <a:prstGeom prst="rect">
-            <a:avLst/>
-          </a:prstGeom>
-        </p:spPr>
-        <p:txBody>
-          <a:bodyPr vert="horz" lIns="91440" tIns="45720" rIns="91440" bIns="45720" rtlCol="0" anchor="b"/>
-          <a:lstStyle>
-            <a:lvl1pPr algn="l">
-              <a:defRPr sz="1200"/>
-            </a:lvl1pPr>
-          </a:lstStyle>
-          <a:p>
-            <a:endParaRPr lang="en-US"/>
-          </a:p>
-        </p:txBody>
-      </p:sp>
-      <p:sp>
-        <p:nvSpPr>
-          <p:cNvPr id="7" name="Slide Number Placeholder 6"/>
-          <p:cNvSpPr>
-            <a:spLocks noGrp="1"/>
-          </p:cNvSpPr>
-          <p:nvPr>
-            <p:ph type="sldNum" sz="quarter" idx="5"/>
-          </p:nvPr>
-        </p:nvSpPr>
-        <p:spPr>
-          <a:xfrm>
-            <a:off x="3884613" y="8685213"/>
-            <a:ext cx="2971800" cy="458787"/>
-          </a:xfrm>
-          <a:prstGeom prst="rect">
-            <a:avLst/>
-          </a:prstGeom>
-        </p:spPr>
-        <p:txBody>
-          <a:bodyPr vert="horz" lIns="91440" tIns="45720" rIns="91440" bIns="45720" rtlCol="0" anchor="b"/>
-          <a:lstStyle>
-            <a:lvl1pPr algn="r">
-              <a:defRPr sz="1200"/>
-            </a:lvl1pPr>
-          </a:lstStyle>
-          <a:p>
-            <a:fld id="{CE5E9CC1-C706-0F49-92D6-E571CC5EEA8F}" type="slidenum">
-              <a:rPr lang="en-US"/>
-              <a:t>‹#›</a:t>
-            </a:fld>
-            <a:endParaRPr lang="en-US"/>
-          </a:p>
-        </p:txBody>
-      </p:sp>
     </p:spTree>
     <p:extLst>
       <p:ext uri="{BB962C8B-B14F-4D97-AF65-F5344CB8AC3E}">
-        <p14:creationId xmlns:p14="http://schemas.microsoft.com/office/powerpoint/2010/main" val="1024086991"/>
+        <p14:creationId xmlns:p14="http://schemas.microsoft.com/office/powerpoint/2010/main" val="674066613"/>
       </p:ext>
     </p:extLst>
   </p:cSld>
@@ -514,10 +295,6 @@
           <a:bodyPr/>
           <a:lstStyle/>
           <a:p>
-            <a:r>
-              <a:rPr lang="en-US" dirty="0"/>
-              <a:t/>
-            </a:r>
             <a:endParaRPr lang="en-US" dirty="0"/>
           </a:p>
         </p:txBody>
@@ -602,10 +379,6 @@
           <a:bodyPr/>
           <a:lstStyle/>
           <a:p>
-            <a:r>
-              <a:rPr lang="en-US" dirty="0"/>
-              <a:t/>
-            </a:r>
             <a:endParaRPr lang="en-US" dirty="0"/>
           </a:p>
         </p:txBody>
@@ -690,10 +463,6 @@
           <a:bodyPr/>
           <a:lstStyle/>
           <a:p>
-            <a:r>
-              <a:rPr lang="en-US" dirty="0"/>
-              <a:t/>
-            </a:r>
             <a:endParaRPr lang="en-US" dirty="0"/>
           </a:p>
         </p:txBody>
@@ -778,10 +547,6 @@
           <a:bodyPr/>
           <a:lstStyle/>
           <a:p>
-            <a:r>
-              <a:rPr lang="en-US" dirty="0"/>
-              <a:t/>
-            </a:r>
             <a:endParaRPr lang="en-US" dirty="0"/>
           </a:p>
         </p:txBody>
@@ -866,10 +631,6 @@
           <a:bodyPr/>
           <a:lstStyle/>
           <a:p>
-            <a:r>
-              <a:rPr lang="en-US" dirty="0"/>
-              <a:t/>
-            </a:r>
             <a:endParaRPr lang="en-US" dirty="0"/>
           </a:p>
         </p:txBody>
@@ -954,10 +715,6 @@
           <a:bodyPr/>
           <a:lstStyle/>
           <a:p>
-            <a:r>
-              <a:rPr lang="en-US" dirty="0"/>
-              <a:t/>
-            </a:r>
             <a:endParaRPr lang="en-US" dirty="0"/>
           </a:p>
         </p:txBody>
@@ -1042,10 +799,6 @@
           <a:bodyPr/>
           <a:lstStyle/>
           <a:p>
-            <a:r>
-              <a:rPr lang="en-US" dirty="0"/>
-              <a:t/>
-            </a:r>
             <a:endParaRPr lang="en-US" dirty="0"/>
           </a:p>
         </p:txBody>
@@ -1130,10 +883,6 @@
           <a:bodyPr/>
           <a:lstStyle/>
           <a:p>
-            <a:r>
-              <a:rPr lang="en-US" dirty="0"/>
-              <a:t/>
-            </a:r>
             <a:endParaRPr lang="en-US" dirty="0"/>
           </a:p>
         </p:txBody>
@@ -1218,10 +967,6 @@
           <a:bodyPr/>
           <a:lstStyle/>
           <a:p>
-            <a:r>
-              <a:rPr lang="en-US" dirty="0"/>
-              <a:t/>
-            </a:r>
             <a:endParaRPr lang="en-US" dirty="0"/>
           </a:p>
         </p:txBody>
@@ -1306,10 +1051,6 @@
           <a:bodyPr/>
           <a:lstStyle/>
           <a:p>
-            <a:r>
-              <a:rPr lang="en-US" dirty="0"/>
-              <a:t/>
-            </a:r>
             <a:endParaRPr lang="en-US" dirty="0"/>
           </a:p>
         </p:txBody>
@@ -1394,10 +1135,6 @@
           <a:bodyPr/>
           <a:lstStyle/>
           <a:p>
-            <a:r>
-              <a:rPr lang="en-US" dirty="0"/>
-              <a:t/>
-            </a:r>
             <a:endParaRPr lang="en-US" dirty="0"/>
           </a:p>
         </p:txBody>
@@ -1482,10 +1219,6 @@
           <a:bodyPr/>
           <a:lstStyle/>
           <a:p>
-            <a:r>
-              <a:rPr lang="en-US" dirty="0"/>
-              <a:t/>
-            </a:r>
             <a:endParaRPr lang="en-US" dirty="0"/>
           </a:p>
         </p:txBody>
@@ -1570,10 +1303,6 @@
           <a:bodyPr/>
           <a:lstStyle/>
           <a:p>
-            <a:r>
-              <a:rPr lang="en-US" dirty="0"/>
-              <a:t/>
-            </a:r>
             <a:endParaRPr lang="en-US" dirty="0"/>
           </a:p>
         </p:txBody>
@@ -1658,10 +1387,6 @@
           <a:bodyPr/>
           <a:lstStyle/>
           <a:p>
-            <a:r>
-              <a:rPr lang="en-US" dirty="0"/>
-              <a:t/>
-            </a:r>
             <a:endParaRPr lang="en-US" dirty="0"/>
           </a:p>
         </p:txBody>
@@ -1746,10 +1471,6 @@
           <a:bodyPr/>
           <a:lstStyle/>
           <a:p>
-            <a:r>
-              <a:rPr lang="en-US" dirty="0"/>
-              <a:t/>
-            </a:r>
             <a:endParaRPr lang="en-US" dirty="0"/>
           </a:p>
         </p:txBody>
@@ -1823,6 +1544,11 @@
 <file path=ppt/slideMasters/slideMaster1.xml><?xml version="1.0" encoding="utf-8"?>
 <p:sldMaster xmlns:a="http://schemas.openxmlformats.org/drawingml/2006/main" xmlns:r="http://schemas.openxmlformats.org/officeDocument/2006/relationships" xmlns:p="http://schemas.openxmlformats.org/presentationml/2006/main">
   <p:cSld>
+    <p:bg>
+      <p:bgRef idx="1001">
+        <a:schemeClr val="bg1"/>
+      </p:bgRef>
+    </p:bg>
     <p:spTree>
       <p:nvGrpSpPr>
         <p:cNvPr id="1" name=""/>
@@ -2122,7 +1848,7 @@
         </p:nvSpPr>
         <p:spPr>
           <a:xfrm>
-            <a:off x="0" y="0"/>
+            <a:off x="114300" y="8092"/>
             <a:ext cx="12192000" cy="6858000"/>
           </a:xfrm>
           <a:prstGeom prst="rect">
@@ -2133,6 +1859,13 @@
           </a:solidFill>
           <a:ln/>
         </p:spPr>
+        <p:txBody>
+          <a:bodyPr/>
+          <a:lstStyle/>
+          <a:p>
+            <a:endParaRPr lang="fr-FR" dirty="0"/>
+          </a:p>
+        </p:txBody>
       </p:sp>
       <p:sp>
         <p:nvSpPr>
@@ -2200,7 +1933,7 @@
           <a:bodyPr wrap="square" rtlCol="0" anchor="ctr"/>
           <a:lstStyle/>
           <a:p>
-            <a:pPr algn="ctr" indent="0" marL="0">
+            <a:pPr marL="0" indent="0" algn="ctr">
               <a:buNone/>
             </a:pPr>
             <a:r>
@@ -2236,9 +1969,101 @@
           <a:bodyPr wrap="square" rtlCol="0" anchor="ctr"/>
           <a:lstStyle/>
           <a:p>
-            <a:pPr algn="ctr" indent="0" marL="0">
-              <a:buNone/>
-            </a:pPr>
+            <a:pPr algn="ctr"/>
+            <a:endParaRPr lang="en-US" sz="1050" b="1" dirty="0">
+              <a:solidFill>
+                <a:srgbClr val="FFFFFF"/>
+              </a:solidFill>
+              <a:latin typeface="Segoe UI" pitchFamily="34" charset="0"/>
+              <a:ea typeface="Segoe UI" pitchFamily="34" charset="-122"/>
+              <a:cs typeface="Segoe UI" pitchFamily="34" charset="-120"/>
+            </a:endParaRPr>
+          </a:p>
+          <a:p>
+            <a:pPr algn="ctr"/>
+            <a:r>
+              <a:rPr lang="en-US" sz="1050" b="1" dirty="0">
+                <a:solidFill>
+                  <a:srgbClr val="FFFFFF"/>
+                </a:solidFill>
+                <a:latin typeface="Segoe UI" pitchFamily="34" charset="0"/>
+                <a:ea typeface="Segoe UI" pitchFamily="34" charset="-122"/>
+                <a:cs typeface="Segoe UI" pitchFamily="34" charset="-120"/>
+              </a:rPr>
+              <a:t>Lien du video : </a:t>
+            </a:r>
+            <a:r>
+              <a:rPr lang="en-US" sz="1050" b="1" dirty="0">
+                <a:solidFill>
+                  <a:schemeClr val="tx2">
+                    <a:lumMod val="20000"/>
+                    <a:lumOff val="80000"/>
+                  </a:schemeClr>
+                </a:solidFill>
+                <a:latin typeface="Segoe UI" pitchFamily="34" charset="0"/>
+                <a:ea typeface="Segoe UI" pitchFamily="34" charset="-122"/>
+                <a:cs typeface="Segoe UI" pitchFamily="34" charset="-120"/>
+              </a:rPr>
+              <a:t>https://drive.google.com/file/d/1nFutqq24J-P5x4GNtqdhcntzP1Vs7NZt/view?usp=sharing</a:t>
+            </a:r>
+            <a:br>
+              <a:rPr lang="en-US" sz="1000" b="1" dirty="0">
+                <a:solidFill>
+                  <a:srgbClr val="FFFFFF"/>
+                </a:solidFill>
+                <a:latin typeface="Segoe UI" pitchFamily="34" charset="0"/>
+                <a:ea typeface="Segoe UI" pitchFamily="34" charset="-122"/>
+                <a:cs typeface="Segoe UI" pitchFamily="34" charset="-120"/>
+              </a:rPr>
+            </a:br>
+            <a:br>
+              <a:rPr lang="en-US" sz="1000" b="1" dirty="0">
+                <a:solidFill>
+                  <a:srgbClr val="FFFFFF"/>
+                </a:solidFill>
+                <a:latin typeface="Segoe UI" pitchFamily="34" charset="0"/>
+                <a:ea typeface="Segoe UI" pitchFamily="34" charset="-122"/>
+                <a:cs typeface="Segoe UI" pitchFamily="34" charset="-120"/>
+              </a:rPr>
+            </a:br>
+            <a:endParaRPr lang="en-US" sz="1000" b="1" dirty="0">
+              <a:solidFill>
+                <a:srgbClr val="FFFFFF"/>
+              </a:solidFill>
+              <a:latin typeface="Segoe UI" pitchFamily="34" charset="0"/>
+              <a:ea typeface="Segoe UI" pitchFamily="34" charset="-122"/>
+              <a:cs typeface="Segoe UI" pitchFamily="34" charset="-120"/>
+            </a:endParaRPr>
+          </a:p>
+          <a:p>
+            <a:pPr algn="ctr"/>
+            <a:r>
+              <a:rPr lang="en-US" sz="1000" b="1" dirty="0">
+                <a:solidFill>
+                  <a:srgbClr val="FFFFFF"/>
+                </a:solidFill>
+                <a:latin typeface="Segoe UI" pitchFamily="34" charset="0"/>
+                <a:ea typeface="Segoe UI" pitchFamily="34" charset="-122"/>
+                <a:cs typeface="Segoe UI" pitchFamily="34" charset="-120"/>
+              </a:rPr>
+              <a:t>Lien GitHub : https://github.com/Cheikh2005/plateforme_alfa.git </a:t>
+            </a:r>
+          </a:p>
+          <a:p>
+            <a:pPr marL="0" indent="0" algn="ctr">
+              <a:buNone/>
+            </a:pPr>
+            <a:r>
+              <a:rPr lang="en-US" sz="5400" b="1" dirty="0" err="1">
+                <a:solidFill>
+                  <a:srgbClr val="FFFFFF"/>
+                </a:solidFill>
+                <a:latin typeface="Segoe UI" pitchFamily="34" charset="0"/>
+                <a:ea typeface="Segoe UI" pitchFamily="34" charset="-122"/>
+                <a:cs typeface="Segoe UI" pitchFamily="34" charset="-120"/>
+              </a:rPr>
+              <a:t>BacPrep</a:t>
+            </a:r>
             <a:r>
               <a:rPr lang="en-US" sz="5400" b="1" dirty="0">
                 <a:solidFill>
@@ -2248,9 +2073,8 @@
                 <a:ea typeface="Segoe UI" pitchFamily="34" charset="-122"/>
                 <a:cs typeface="Segoe UI" pitchFamily="34" charset="-120"/>
               </a:rPr>
-              <a:t>BacPrep</a:t>
-            </a:r>
-            <a:endParaRPr lang="en-US" sz="5400" dirty="0"/>
+              <a:t>   </a:t>
+            </a:r>
           </a:p>
         </p:txBody>
       </p:sp>
@@ -2275,9 +2099,46 @@
           <a:bodyPr wrap="square" rtlCol="0" anchor="ctr"/>
           <a:lstStyle/>
           <a:p>
-            <a:pPr algn="ctr" indent="0" marL="0">
-              <a:buNone/>
-            </a:pPr>
+            <a:pPr marL="0" indent="0" algn="ctr">
+              <a:buNone/>
+            </a:pPr>
+            <a:endParaRPr lang="en-US" sz="2000" dirty="0">
+              <a:solidFill>
+                <a:srgbClr val="FFA000"/>
+              </a:solidFill>
+              <a:latin typeface="Segoe UI" pitchFamily="34" charset="0"/>
+              <a:ea typeface="Segoe UI" pitchFamily="34" charset="-122"/>
+              <a:cs typeface="Segoe UI" pitchFamily="34" charset="-120"/>
+            </a:endParaRPr>
+          </a:p>
+          <a:p>
+            <a:pPr marL="0" indent="0" algn="ctr">
+              <a:buNone/>
+            </a:pPr>
+            <a:endParaRPr lang="en-US" sz="2000" dirty="0">
+              <a:solidFill>
+                <a:srgbClr val="FFA000"/>
+              </a:solidFill>
+              <a:latin typeface="Segoe UI" pitchFamily="34" charset="0"/>
+              <a:ea typeface="Segoe UI" pitchFamily="34" charset="-122"/>
+              <a:cs typeface="Segoe UI" pitchFamily="34" charset="-120"/>
+            </a:endParaRPr>
+          </a:p>
+          <a:p>
+            <a:pPr marL="0" indent="0" algn="ctr">
+              <a:buNone/>
+            </a:pPr>
+            <a:r>
+              <a:rPr lang="en-US" sz="2000" dirty="0" err="1">
+                <a:solidFill>
+                  <a:srgbClr val="FFA000"/>
+                </a:solidFill>
+                <a:latin typeface="Segoe UI" pitchFamily="34" charset="0"/>
+                <a:ea typeface="Segoe UI" pitchFamily="34" charset="-122"/>
+                <a:cs typeface="Segoe UI" pitchFamily="34" charset="-120"/>
+              </a:rPr>
+              <a:t>Plateforme</a:t>
+            </a:r>
             <a:r>
               <a:rPr lang="en-US" sz="2000" dirty="0">
                 <a:solidFill>
@@ -2287,9 +2148,58 @@
                 <a:ea typeface="Segoe UI" pitchFamily="34" charset="-122"/>
                 <a:cs typeface="Segoe UI" pitchFamily="34" charset="-120"/>
               </a:rPr>
-              <a:t>Plateforme de Révision pour le Baccalauréat Mauritanien</a:t>
-            </a:r>
-            <a:endParaRPr lang="en-US" sz="2000" dirty="0"/>
+              <a:t> de Révision pour le </a:t>
+            </a:r>
+            <a:r>
+              <a:rPr lang="en-US" sz="2000" dirty="0" err="1">
+                <a:solidFill>
+                  <a:srgbClr val="FFA000"/>
+                </a:solidFill>
+                <a:latin typeface="Segoe UI" pitchFamily="34" charset="0"/>
+                <a:ea typeface="Segoe UI" pitchFamily="34" charset="-122"/>
+                <a:cs typeface="Segoe UI" pitchFamily="34" charset="-120"/>
+              </a:rPr>
+              <a:t>Baccalauréat</a:t>
+            </a:r>
+            <a:r>
+              <a:rPr lang="en-US" sz="2000" dirty="0">
+                <a:solidFill>
+                  <a:srgbClr val="FFA000"/>
+                </a:solidFill>
+                <a:latin typeface="Segoe UI" pitchFamily="34" charset="0"/>
+                <a:ea typeface="Segoe UI" pitchFamily="34" charset="-122"/>
+                <a:cs typeface="Segoe UI" pitchFamily="34" charset="-120"/>
+              </a:rPr>
+              <a:t> </a:t>
+            </a:r>
+            <a:r>
+              <a:rPr lang="en-US" sz="2000" dirty="0" err="1">
+                <a:solidFill>
+                  <a:srgbClr val="FFA000"/>
+                </a:solidFill>
+                <a:latin typeface="Segoe UI" pitchFamily="34" charset="0"/>
+                <a:ea typeface="Segoe UI" pitchFamily="34" charset="-122"/>
+                <a:cs typeface="Segoe UI" pitchFamily="34" charset="-120"/>
+              </a:rPr>
+              <a:t>Mauritanien</a:t>
+            </a:r>
+            <a:endParaRPr lang="en-US" sz="2000" dirty="0">
+              <a:solidFill>
+                <a:srgbClr val="FFA000"/>
+              </a:solidFill>
+              <a:latin typeface="Segoe UI" pitchFamily="34" charset="0"/>
+              <a:ea typeface="Segoe UI" pitchFamily="34" charset="-122"/>
+              <a:cs typeface="Segoe UI" pitchFamily="34" charset="-120"/>
+            </a:endParaRPr>
+          </a:p>
+          <a:p>
+            <a:pPr marL="0" indent="0" algn="ctr">
+              <a:buNone/>
+            </a:pPr>
+            <a:r>
+              <a:rPr lang="en-US" sz="2000" dirty="0"/>
+              <a:t> </a:t>
+            </a:r>
           </a:p>
         </p:txBody>
       </p:sp>
@@ -2334,7 +2244,7 @@
           <a:bodyPr wrap="square" rtlCol="0" anchor="ctr"/>
           <a:lstStyle/>
           <a:p>
-            <a:pPr algn="ctr" indent="0" marL="0">
+            <a:pPr marL="0" indent="0" algn="ctr">
               <a:buNone/>
             </a:pPr>
             <a:r>
@@ -2400,7 +2310,7 @@
           <a:bodyPr wrap="square" rtlCol="0" anchor="ctr"/>
           <a:lstStyle/>
           <a:p>
-            <a:pPr algn="ctr" indent="0" marL="0">
+            <a:pPr marL="0" indent="0" algn="ctr">
               <a:buNone/>
             </a:pPr>
             <a:r>
@@ -2466,7 +2376,7 @@
           <a:bodyPr wrap="square" rtlCol="0" anchor="ctr"/>
           <a:lstStyle/>
           <a:p>
-            <a:pPr algn="ctr" indent="0" marL="0">
+            <a:pPr marL="0" indent="0" algn="ctr">
               <a:buNone/>
             </a:pPr>
             <a:r>
@@ -2532,7 +2442,7 @@
           <a:bodyPr wrap="square" rtlCol="0" anchor="ctr"/>
           <a:lstStyle/>
           <a:p>
-            <a:pPr algn="ctr" indent="0" marL="0">
+            <a:pPr marL="0" indent="0" algn="ctr">
               <a:buNone/>
             </a:pPr>
             <a:r>
@@ -2598,7 +2508,7 @@
           <a:bodyPr wrap="square" rtlCol="0" anchor="ctr"/>
           <a:lstStyle/>
           <a:p>
-            <a:pPr algn="ctr" indent="0" marL="0">
+            <a:pPr marL="0" indent="0" algn="ctr">
               <a:buNone/>
             </a:pPr>
             <a:r>
@@ -2702,7 +2612,7 @@
           <a:bodyPr wrap="square" rtlCol="0" anchor="ctr"/>
           <a:lstStyle/>
           <a:p>
-            <a:pPr indent="0" marL="0">
+            <a:pPr marL="0" indent="0">
               <a:buNone/>
             </a:pPr>
             <a:r>
@@ -2788,7 +2698,7 @@
           <a:bodyPr wrap="square" rtlCol="0" anchor="ctr"/>
           <a:lstStyle/>
           <a:p>
-            <a:pPr indent="0" marL="0">
+            <a:pPr marL="0" indent="0">
               <a:buNone/>
             </a:pPr>
             <a:r>
@@ -2827,7 +2737,7 @@
           <a:bodyPr wrap="square" rtlCol="0" anchor="ctr"/>
           <a:lstStyle/>
           <a:p>
-            <a:pPr indent="0" marL="0">
+            <a:pPr marL="0" indent="0">
               <a:buNone/>
             </a:pPr>
             <a:r>
@@ -2913,7 +2823,7 @@
           <a:bodyPr wrap="square" rtlCol="0" anchor="ctr"/>
           <a:lstStyle/>
           <a:p>
-            <a:pPr indent="0" marL="0">
+            <a:pPr marL="0" indent="0">
               <a:buNone/>
             </a:pPr>
             <a:r>
@@ -2952,7 +2862,7 @@
           <a:bodyPr wrap="square" rtlCol="0" anchor="ctr"/>
           <a:lstStyle/>
           <a:p>
-            <a:pPr indent="0" marL="0">
+            <a:pPr marL="0" indent="0">
               <a:buNone/>
             </a:pPr>
             <a:r>
@@ -2991,7 +2901,7 @@
           <a:bodyPr wrap="square" rtlCol="0" anchor="ctr"/>
           <a:lstStyle/>
           <a:p>
-            <a:pPr indent="0" marL="0">
+            <a:pPr marL="0" indent="0">
               <a:buNone/>
             </a:pPr>
             <a:r>
@@ -3030,7 +2940,7 @@
           <a:bodyPr wrap="square" rtlCol="0" anchor="ctr"/>
           <a:lstStyle/>
           <a:p>
-            <a:pPr indent="0" marL="0">
+            <a:pPr marL="0" indent="0">
               <a:buNone/>
             </a:pPr>
             <a:r>
@@ -3069,7 +2979,7 @@
           <a:bodyPr wrap="square" rtlCol="0" anchor="ctr"/>
           <a:lstStyle/>
           <a:p>
-            <a:pPr indent="0" marL="0">
+            <a:pPr marL="0" indent="0">
               <a:buNone/>
             </a:pPr>
             <a:r>
@@ -3108,7 +3018,7 @@
           <a:bodyPr wrap="square" rtlCol="0" anchor="ctr"/>
           <a:lstStyle/>
           <a:p>
-            <a:pPr indent="0" marL="0">
+            <a:pPr marL="0" indent="0">
               <a:buNone/>
             </a:pPr>
             <a:r>
@@ -3147,7 +3057,7 @@
           <a:bodyPr wrap="square" rtlCol="0" anchor="ctr"/>
           <a:lstStyle/>
           <a:p>
-            <a:pPr indent="0" marL="0">
+            <a:pPr marL="0" indent="0">
               <a:buNone/>
             </a:pPr>
             <a:r>
@@ -3186,7 +3096,7 @@
           <a:bodyPr wrap="square" rtlCol="0" anchor="ctr"/>
           <a:lstStyle/>
           <a:p>
-            <a:pPr indent="0" marL="0">
+            <a:pPr marL="0" indent="0">
               <a:buNone/>
             </a:pPr>
             <a:r>
@@ -3225,7 +3135,7 @@
           <a:bodyPr wrap="square" rtlCol="0" anchor="ctr"/>
           <a:lstStyle/>
           <a:p>
-            <a:pPr indent="0" marL="0">
+            <a:pPr marL="0" indent="0">
               <a:buNone/>
             </a:pPr>
             <a:r>
@@ -3264,7 +3174,7 @@
           <a:bodyPr wrap="square" rtlCol="0" anchor="ctr"/>
           <a:lstStyle/>
           <a:p>
-            <a:pPr indent="0" marL="0">
+            <a:pPr marL="0" indent="0">
               <a:buNone/>
             </a:pPr>
             <a:r>
@@ -3368,7 +3278,7 @@
           <a:bodyPr wrap="square" rtlCol="0" anchor="ctr"/>
           <a:lstStyle/>
           <a:p>
-            <a:pPr indent="0" marL="0">
+            <a:pPr marL="0" indent="0">
               <a:buNone/>
             </a:pPr>
             <a:r>
@@ -3456,7 +3366,7 @@
           <a:bodyPr wrap="square" rtlCol="0" anchor="ctr"/>
           <a:lstStyle/>
           <a:p>
-            <a:pPr algn="ctr" indent="0" marL="0">
+            <a:pPr marL="0" indent="0" algn="ctr">
               <a:buNone/>
             </a:pPr>
             <a:r>
@@ -3495,7 +3405,7 @@
           <a:bodyPr wrap="square" rtlCol="0" anchor="ctr"/>
           <a:lstStyle/>
           <a:p>
-            <a:pPr indent="0" marL="0">
+            <a:pPr marL="0" indent="0">
               <a:buNone/>
             </a:pPr>
             <a:r>
@@ -3534,7 +3444,7 @@
           <a:bodyPr wrap="square" rtlCol="0" anchor="ctr"/>
           <a:lstStyle/>
           <a:p>
-            <a:pPr indent="0" marL="0">
+            <a:pPr marL="0" indent="0">
               <a:buNone/>
             </a:pPr>
             <a:r>
@@ -3551,7 +3461,7 @@
             <a:endParaRPr lang="en-US" sz="1000" dirty="0"/>
           </a:p>
           <a:p>
-            <a:pPr indent="0" marL="0">
+            <a:pPr marL="0" indent="0">
               <a:buNone/>
             </a:pPr>
             <a:r>
@@ -3590,7 +3500,7 @@
           <a:bodyPr wrap="square" rtlCol="0" anchor="ctr"/>
           <a:lstStyle/>
           <a:p>
-            <a:pPr indent="0" marL="0">
+            <a:pPr marL="0" indent="0">
               <a:buNone/>
             </a:pPr>
             <a:r>
@@ -3629,7 +3539,7 @@
           <a:bodyPr wrap="square" rtlCol="0" anchor="ctr"/>
           <a:lstStyle/>
           <a:p>
-            <a:pPr indent="0" marL="0">
+            <a:pPr marL="0" indent="0">
               <a:buNone/>
             </a:pPr>
             <a:r>
@@ -3646,7 +3556,7 @@
             <a:endParaRPr lang="en-US" sz="1000" dirty="0"/>
           </a:p>
           <a:p>
-            <a:pPr indent="0" marL="0">
+            <a:pPr marL="0" indent="0">
               <a:buNone/>
             </a:pPr>
             <a:r>
@@ -3685,7 +3595,7 @@
           <a:bodyPr wrap="square" rtlCol="0" anchor="ctr"/>
           <a:lstStyle/>
           <a:p>
-            <a:pPr indent="0" marL="0">
+            <a:pPr marL="0" indent="0">
               <a:buNone/>
             </a:pPr>
             <a:r>
@@ -3724,7 +3634,7 @@
           <a:bodyPr wrap="square" rtlCol="0" anchor="ctr"/>
           <a:lstStyle/>
           <a:p>
-            <a:pPr indent="0" marL="0">
+            <a:pPr marL="0" indent="0">
               <a:buNone/>
             </a:pPr>
             <a:r>
@@ -3741,7 +3651,7 @@
             <a:endParaRPr lang="en-US" sz="1000" dirty="0"/>
           </a:p>
           <a:p>
-            <a:pPr indent="0" marL="0">
+            <a:pPr marL="0" indent="0">
               <a:buNone/>
             </a:pPr>
             <a:r>
@@ -3780,7 +3690,7 @@
           <a:bodyPr wrap="square" rtlCol="0" anchor="ctr"/>
           <a:lstStyle/>
           <a:p>
-            <a:pPr indent="0" marL="0">
+            <a:pPr marL="0" indent="0">
               <a:buNone/>
             </a:pPr>
             <a:r>
@@ -3819,7 +3729,7 @@
           <a:bodyPr wrap="square" rtlCol="0" anchor="ctr"/>
           <a:lstStyle/>
           <a:p>
-            <a:pPr indent="0" marL="0">
+            <a:pPr marL="0" indent="0">
               <a:buNone/>
             </a:pPr>
             <a:r>
@@ -3907,7 +3817,7 @@
           <a:bodyPr wrap="square" rtlCol="0" anchor="ctr"/>
           <a:lstStyle/>
           <a:p>
-            <a:pPr algn="ctr" indent="0" marL="0">
+            <a:pPr marL="0" indent="0" algn="ctr">
               <a:buNone/>
             </a:pPr>
             <a:r>
@@ -3946,7 +3856,7 @@
           <a:bodyPr wrap="square" rtlCol="0" anchor="ctr"/>
           <a:lstStyle/>
           <a:p>
-            <a:pPr indent="0" marL="0">
+            <a:pPr marL="0" indent="0">
               <a:buNone/>
             </a:pPr>
             <a:r>
@@ -3985,7 +3895,7 @@
           <a:bodyPr wrap="square" rtlCol="0" anchor="ctr"/>
           <a:lstStyle/>
           <a:p>
-            <a:pPr indent="0" marL="0">
+            <a:pPr marL="0" indent="0">
               <a:buNone/>
             </a:pPr>
             <a:r>
@@ -4024,7 +3934,7 @@
           <a:bodyPr wrap="square" rtlCol="0" anchor="ctr"/>
           <a:lstStyle/>
           <a:p>
-            <a:pPr indent="0" marL="0">
+            <a:pPr marL="0" indent="0">
               <a:buNone/>
             </a:pPr>
             <a:r>
@@ -4063,7 +3973,7 @@
           <a:bodyPr wrap="square" rtlCol="0" anchor="ctr"/>
           <a:lstStyle/>
           <a:p>
-            <a:pPr indent="0" marL="0">
+            <a:pPr marL="0" indent="0">
               <a:buNone/>
             </a:pPr>
             <a:r>
@@ -4102,7 +4012,7 @@
           <a:bodyPr wrap="square" rtlCol="0" anchor="ctr"/>
           <a:lstStyle/>
           <a:p>
-            <a:pPr indent="0" marL="0">
+            <a:pPr marL="0" indent="0">
               <a:buNone/>
             </a:pPr>
             <a:r>
@@ -4141,7 +4051,7 @@
           <a:bodyPr wrap="square" rtlCol="0" anchor="ctr"/>
           <a:lstStyle/>
           <a:p>
-            <a:pPr indent="0" marL="0">
+            <a:pPr marL="0" indent="0">
               <a:buNone/>
             </a:pPr>
             <a:r>
@@ -4180,7 +4090,7 @@
           <a:bodyPr wrap="square" rtlCol="0" anchor="ctr"/>
           <a:lstStyle/>
           <a:p>
-            <a:pPr indent="0" marL="0">
+            <a:pPr marL="0" indent="0">
               <a:buNone/>
             </a:pPr>
             <a:r>
@@ -4219,7 +4129,7 @@
           <a:bodyPr wrap="square" rtlCol="0" anchor="ctr"/>
           <a:lstStyle/>
           <a:p>
-            <a:pPr indent="0" marL="0">
+            <a:pPr marL="0" indent="0">
               <a:buNone/>
             </a:pPr>
             <a:r>
@@ -4258,7 +4168,7 @@
           <a:bodyPr wrap="square" rtlCol="0" anchor="ctr"/>
           <a:lstStyle/>
           <a:p>
-            <a:pPr indent="0" marL="0">
+            <a:pPr marL="0" indent="0">
               <a:buNone/>
             </a:pPr>
             <a:r>
@@ -4297,7 +4207,7 @@
           <a:bodyPr wrap="square" rtlCol="0" anchor="ctr"/>
           <a:lstStyle/>
           <a:p>
-            <a:pPr indent="0" marL="0">
+            <a:pPr marL="0" indent="0">
               <a:buNone/>
             </a:pPr>
             <a:r>
@@ -4401,7 +4311,7 @@
           <a:bodyPr wrap="square" rtlCol="0" anchor="ctr"/>
           <a:lstStyle/>
           <a:p>
-            <a:pPr indent="0" marL="0">
+            <a:pPr marL="0" indent="0">
               <a:buNone/>
             </a:pPr>
             <a:r>
@@ -4489,7 +4399,7 @@
           <a:bodyPr wrap="square" rtlCol="0" anchor="ctr"/>
           <a:lstStyle/>
           <a:p>
-            <a:pPr algn="ctr" indent="0" marL="0">
+            <a:pPr marL="0" indent="0" algn="ctr">
               <a:buNone/>
             </a:pPr>
             <a:r>
@@ -4528,7 +4438,7 @@
           <a:bodyPr wrap="square" rtlCol="0" anchor="ctr"/>
           <a:lstStyle/>
           <a:p>
-            <a:pPr indent="0" marL="0">
+            <a:pPr marL="0" indent="0">
               <a:buNone/>
             </a:pPr>
             <a:r>
@@ -4567,7 +4477,7 @@
           <a:bodyPr wrap="square" rtlCol="0" anchor="ctr"/>
           <a:lstStyle/>
           <a:p>
-            <a:pPr indent="0" marL="0">
+            <a:pPr marL="0" indent="0">
               <a:buNone/>
             </a:pPr>
             <a:r>
@@ -4606,7 +4516,7 @@
           <a:bodyPr wrap="square" rtlCol="0" anchor="ctr"/>
           <a:lstStyle/>
           <a:p>
-            <a:pPr indent="0" marL="0">
+            <a:pPr marL="0" indent="0">
               <a:buNone/>
             </a:pPr>
             <a:r>
@@ -4645,7 +4555,7 @@
           <a:bodyPr wrap="square" rtlCol="0" anchor="ctr"/>
           <a:lstStyle/>
           <a:p>
-            <a:pPr indent="0" marL="0">
+            <a:pPr marL="0" indent="0">
               <a:buNone/>
             </a:pPr>
             <a:r>
@@ -4684,7 +4594,7 @@
           <a:bodyPr wrap="square" rtlCol="0" anchor="ctr"/>
           <a:lstStyle/>
           <a:p>
-            <a:pPr indent="0" marL="0">
+            <a:pPr marL="0" indent="0">
               <a:buNone/>
             </a:pPr>
             <a:r>
@@ -4772,7 +4682,7 @@
           <a:bodyPr wrap="square" rtlCol="0" anchor="ctr"/>
           <a:lstStyle/>
           <a:p>
-            <a:pPr algn="ctr" indent="0" marL="0">
+            <a:pPr marL="0" indent="0" algn="ctr">
               <a:buNone/>
             </a:pPr>
             <a:r>
@@ -4811,7 +4721,7 @@
           <a:bodyPr wrap="square" rtlCol="0" anchor="ctr"/>
           <a:lstStyle/>
           <a:p>
-            <a:pPr indent="0" marL="0">
+            <a:pPr marL="0" indent="0">
               <a:buNone/>
             </a:pPr>
             <a:r>
@@ -4850,7 +4760,7 @@
           <a:bodyPr wrap="square" rtlCol="0" anchor="ctr"/>
           <a:lstStyle/>
           <a:p>
-            <a:pPr indent="0" marL="0">
+            <a:pPr marL="0" indent="0">
               <a:buNone/>
             </a:pPr>
             <a:r>
@@ -4889,7 +4799,7 @@
           <a:bodyPr wrap="square" rtlCol="0" anchor="ctr"/>
           <a:lstStyle/>
           <a:p>
-            <a:pPr indent="0" marL="0">
+            <a:pPr marL="0" indent="0">
               <a:buNone/>
             </a:pPr>
             <a:r>
@@ -4928,7 +4838,7 @@
           <a:bodyPr wrap="square" rtlCol="0" anchor="ctr"/>
           <a:lstStyle/>
           <a:p>
-            <a:pPr indent="0" marL="0">
+            <a:pPr marL="0" indent="0">
               <a:buNone/>
             </a:pPr>
             <a:r>
@@ -4967,7 +4877,7 @@
           <a:bodyPr wrap="square" rtlCol="0" anchor="ctr"/>
           <a:lstStyle/>
           <a:p>
-            <a:pPr indent="0" marL="0">
+            <a:pPr marL="0" indent="0">
               <a:buNone/>
             </a:pPr>
             <a:r>
@@ -5055,7 +4965,7 @@
           <a:bodyPr wrap="square" rtlCol="0" anchor="ctr"/>
           <a:lstStyle/>
           <a:p>
-            <a:pPr algn="ctr" indent="0" marL="0">
+            <a:pPr marL="0" indent="0" algn="ctr">
               <a:buNone/>
             </a:pPr>
             <a:r>
@@ -5094,7 +5004,7 @@
           <a:bodyPr wrap="square" rtlCol="0" anchor="ctr"/>
           <a:lstStyle/>
           <a:p>
-            <a:pPr indent="0" marL="0">
+            <a:pPr marL="0" indent="0">
               <a:buNone/>
             </a:pPr>
             <a:r>
@@ -5133,7 +5043,7 @@
           <a:bodyPr wrap="square" rtlCol="0" anchor="ctr"/>
           <a:lstStyle/>
           <a:p>
-            <a:pPr indent="0" marL="0">
+            <a:pPr marL="0" indent="0">
               <a:buNone/>
             </a:pPr>
             <a:r>
@@ -5172,7 +5082,7 @@
           <a:bodyPr wrap="square" rtlCol="0" anchor="ctr"/>
           <a:lstStyle/>
           <a:p>
-            <a:pPr indent="0" marL="0">
+            <a:pPr marL="0" indent="0">
               <a:buNone/>
             </a:pPr>
             <a:r>
@@ -5211,7 +5121,7 @@
           <a:bodyPr wrap="square" rtlCol="0" anchor="ctr"/>
           <a:lstStyle/>
           <a:p>
-            <a:pPr indent="0" marL="0">
+            <a:pPr marL="0" indent="0">
               <a:buNone/>
             </a:pPr>
             <a:r>
@@ -5250,7 +5160,7 @@
           <a:bodyPr wrap="square" rtlCol="0" anchor="ctr"/>
           <a:lstStyle/>
           <a:p>
-            <a:pPr indent="0" marL="0">
+            <a:pPr marL="0" indent="0">
               <a:buNone/>
             </a:pPr>
             <a:r>
@@ -5338,7 +5248,7 @@
           <a:bodyPr wrap="square" rtlCol="0" anchor="ctr"/>
           <a:lstStyle/>
           <a:p>
-            <a:pPr algn="ctr" indent="0" marL="0">
+            <a:pPr marL="0" indent="0" algn="ctr">
               <a:buNone/>
             </a:pPr>
             <a:r>
@@ -5377,7 +5287,7 @@
           <a:bodyPr wrap="square" rtlCol="0" anchor="ctr"/>
           <a:lstStyle/>
           <a:p>
-            <a:pPr indent="0" marL="0">
+            <a:pPr marL="0" indent="0">
               <a:buNone/>
             </a:pPr>
             <a:r>
@@ -5416,7 +5326,7 @@
           <a:bodyPr wrap="square" rtlCol="0" anchor="ctr"/>
           <a:lstStyle/>
           <a:p>
-            <a:pPr indent="0" marL="0">
+            <a:pPr marL="0" indent="0">
               <a:buNone/>
             </a:pPr>
             <a:r>
@@ -5455,7 +5365,7 @@
           <a:bodyPr wrap="square" rtlCol="0" anchor="ctr"/>
           <a:lstStyle/>
           <a:p>
-            <a:pPr indent="0" marL="0">
+            <a:pPr marL="0" indent="0">
               <a:buNone/>
             </a:pPr>
             <a:r>
@@ -5494,7 +5404,7 @@
           <a:bodyPr wrap="square" rtlCol="0" anchor="ctr"/>
           <a:lstStyle/>
           <a:p>
-            <a:pPr indent="0" marL="0">
+            <a:pPr marL="0" indent="0">
               <a:buNone/>
             </a:pPr>
             <a:r>
@@ -5582,7 +5492,7 @@
           <a:bodyPr wrap="square" rtlCol="0" anchor="ctr"/>
           <a:lstStyle/>
           <a:p>
-            <a:pPr algn="ctr" indent="0" marL="0">
+            <a:pPr marL="0" indent="0" algn="ctr">
               <a:buNone/>
             </a:pPr>
             <a:r>
@@ -5621,7 +5531,7 @@
           <a:bodyPr wrap="square" rtlCol="0" anchor="ctr"/>
           <a:lstStyle/>
           <a:p>
-            <a:pPr indent="0" marL="0">
+            <a:pPr marL="0" indent="0">
               <a:buNone/>
             </a:pPr>
             <a:r>
@@ -5660,7 +5570,7 @@
           <a:bodyPr wrap="square" rtlCol="0" anchor="ctr"/>
           <a:lstStyle/>
           <a:p>
-            <a:pPr indent="0" marL="0">
+            <a:pPr marL="0" indent="0">
               <a:buNone/>
             </a:pPr>
             <a:r>
@@ -5699,7 +5609,7 @@
           <a:bodyPr wrap="square" rtlCol="0" anchor="ctr"/>
           <a:lstStyle/>
           <a:p>
-            <a:pPr indent="0" marL="0">
+            <a:pPr marL="0" indent="0">
               <a:buNone/>
             </a:pPr>
             <a:r>
@@ -5738,7 +5648,7 @@
           <a:bodyPr wrap="square" rtlCol="0" anchor="ctr"/>
           <a:lstStyle/>
           <a:p>
-            <a:pPr indent="0" marL="0">
+            <a:pPr marL="0" indent="0">
               <a:buNone/>
             </a:pPr>
             <a:r>
@@ -5777,7 +5687,7 @@
           <a:bodyPr wrap="square" rtlCol="0" anchor="ctr"/>
           <a:lstStyle/>
           <a:p>
-            <a:pPr indent="0" marL="0">
+            <a:pPr marL="0" indent="0">
               <a:buNone/>
             </a:pPr>
             <a:r>
@@ -5865,7 +5775,7 @@
           <a:bodyPr wrap="square" rtlCol="0" anchor="ctr"/>
           <a:lstStyle/>
           <a:p>
-            <a:pPr algn="ctr" indent="0" marL="0">
+            <a:pPr marL="0" indent="0" algn="ctr">
               <a:buNone/>
             </a:pPr>
             <a:r>
@@ -5904,7 +5814,7 @@
           <a:bodyPr wrap="square" rtlCol="0" anchor="ctr"/>
           <a:lstStyle/>
           <a:p>
-            <a:pPr indent="0" marL="0">
+            <a:pPr marL="0" indent="0">
               <a:buNone/>
             </a:pPr>
             <a:r>
@@ -5943,7 +5853,7 @@
           <a:bodyPr wrap="square" rtlCol="0" anchor="ctr"/>
           <a:lstStyle/>
           <a:p>
-            <a:pPr indent="0" marL="0">
+            <a:pPr marL="0" indent="0">
               <a:buNone/>
             </a:pPr>
             <a:r>
@@ -5982,7 +5892,7 @@
           <a:bodyPr wrap="square" rtlCol="0" anchor="ctr"/>
           <a:lstStyle/>
           <a:p>
-            <a:pPr indent="0" marL="0">
+            <a:pPr marL="0" indent="0">
               <a:buNone/>
             </a:pPr>
             <a:r>
@@ -6021,7 +5931,7 @@
           <a:bodyPr wrap="square" rtlCol="0" anchor="ctr"/>
           <a:lstStyle/>
           <a:p>
-            <a:pPr indent="0" marL="0">
+            <a:pPr marL="0" indent="0">
               <a:buNone/>
             </a:pPr>
             <a:r>
@@ -6060,7 +5970,7 @@
           <a:bodyPr wrap="square" rtlCol="0" anchor="ctr"/>
           <a:lstStyle/>
           <a:p>
-            <a:pPr indent="0" marL="0">
+            <a:pPr marL="0" indent="0">
               <a:buNone/>
             </a:pPr>
             <a:r>
@@ -6148,7 +6058,7 @@
           <a:bodyPr wrap="square" rtlCol="0" anchor="ctr"/>
           <a:lstStyle/>
           <a:p>
-            <a:pPr algn="ctr" indent="0" marL="0">
+            <a:pPr marL="0" indent="0" algn="ctr">
               <a:buNone/>
             </a:pPr>
             <a:r>
@@ -6187,7 +6097,7 @@
           <a:bodyPr wrap="square" rtlCol="0" anchor="ctr"/>
           <a:lstStyle/>
           <a:p>
-            <a:pPr indent="0" marL="0">
+            <a:pPr marL="0" indent="0">
               <a:buNone/>
             </a:pPr>
             <a:r>
@@ -6226,7 +6136,7 @@
           <a:bodyPr wrap="square" rtlCol="0" anchor="ctr"/>
           <a:lstStyle/>
           <a:p>
-            <a:pPr indent="0" marL="0">
+            <a:pPr marL="0" indent="0">
               <a:buNone/>
             </a:pPr>
             <a:r>
@@ -6265,7 +6175,7 @@
           <a:bodyPr wrap="square" rtlCol="0" anchor="ctr"/>
           <a:lstStyle/>
           <a:p>
-            <a:pPr indent="0" marL="0">
+            <a:pPr marL="0" indent="0">
               <a:buNone/>
             </a:pPr>
             <a:r>
@@ -6304,7 +6214,7 @@
           <a:bodyPr wrap="square" rtlCol="0" anchor="ctr"/>
           <a:lstStyle/>
           <a:p>
-            <a:pPr indent="0" marL="0">
+            <a:pPr marL="0" indent="0">
               <a:buNone/>
             </a:pPr>
             <a:r>
@@ -6392,7 +6302,7 @@
           <a:bodyPr wrap="square" rtlCol="0" anchor="ctr"/>
           <a:lstStyle/>
           <a:p>
-            <a:pPr algn="ctr" indent="0" marL="0">
+            <a:pPr marL="0" indent="0" algn="ctr">
               <a:buNone/>
             </a:pPr>
             <a:r>
@@ -6431,7 +6341,7 @@
           <a:bodyPr wrap="square" rtlCol="0" anchor="ctr"/>
           <a:lstStyle/>
           <a:p>
-            <a:pPr indent="0" marL="0">
+            <a:pPr marL="0" indent="0">
               <a:buNone/>
             </a:pPr>
             <a:r>
@@ -6470,7 +6380,7 @@
           <a:bodyPr wrap="square" rtlCol="0" anchor="ctr"/>
           <a:lstStyle/>
           <a:p>
-            <a:pPr indent="0" marL="0">
+            <a:pPr marL="0" indent="0">
               <a:buNone/>
             </a:pPr>
             <a:r>
@@ -6509,7 +6419,7 @@
           <a:bodyPr wrap="square" rtlCol="0" anchor="ctr"/>
           <a:lstStyle/>
           <a:p>
-            <a:pPr indent="0" marL="0">
+            <a:pPr marL="0" indent="0">
               <a:buNone/>
             </a:pPr>
             <a:r>
@@ -6548,7 +6458,7 @@
           <a:bodyPr wrap="square" rtlCol="0" anchor="ctr"/>
           <a:lstStyle/>
           <a:p>
-            <a:pPr indent="0" marL="0">
+            <a:pPr marL="0" indent="0">
               <a:buNone/>
             </a:pPr>
             <a:r>
@@ -6636,7 +6546,7 @@
           <a:bodyPr wrap="square" rtlCol="0" anchor="ctr"/>
           <a:lstStyle/>
           <a:p>
-            <a:pPr algn="ctr" indent="0" marL="0">
+            <a:pPr marL="0" indent="0" algn="ctr">
               <a:buNone/>
             </a:pPr>
             <a:r>
@@ -6675,7 +6585,7 @@
           <a:bodyPr wrap="square" rtlCol="0" anchor="ctr"/>
           <a:lstStyle/>
           <a:p>
-            <a:pPr indent="0" marL="0">
+            <a:pPr marL="0" indent="0">
               <a:buNone/>
             </a:pPr>
             <a:r>
@@ -6714,7 +6624,7 @@
           <a:bodyPr wrap="square" rtlCol="0" anchor="ctr"/>
           <a:lstStyle/>
           <a:p>
-            <a:pPr indent="0" marL="0">
+            <a:pPr marL="0" indent="0">
               <a:buNone/>
             </a:pPr>
             <a:r>
@@ -6753,7 +6663,7 @@
           <a:bodyPr wrap="square" rtlCol="0" anchor="ctr"/>
           <a:lstStyle/>
           <a:p>
-            <a:pPr indent="0" marL="0">
+            <a:pPr marL="0" indent="0">
               <a:buNone/>
             </a:pPr>
             <a:r>
@@ -6857,7 +6767,7 @@
           <a:bodyPr wrap="square" rtlCol="0" anchor="ctr"/>
           <a:lstStyle/>
           <a:p>
-            <a:pPr indent="0" marL="0">
+            <a:pPr marL="0" indent="0">
               <a:buNone/>
             </a:pPr>
             <a:r>
@@ -6891,17 +6801,41 @@
         </p:nvGraphicFramePr>
         <p:xfrm>
           <a:off x="274320" y="594360"/>
-          <a:ext cx="11338560" cy="914400"/>
+          <a:ext cx="11338560" cy="3730752"/>
         </p:xfrm>
         <a:graphic>
           <a:graphicData uri="http://schemas.openxmlformats.org/drawingml/2006/table">
             <a:tbl>
               <a:tblPr/>
               <a:tblGrid>
-                <a:gridCol w="1097280"/>
-                <a:gridCol w="2743200"/>
-                <a:gridCol w="4754880"/>
-                <a:gridCol w="2743200"/>
+                <a:gridCol w="1097280">
+                  <a:extLst>
+                    <a:ext uri="{9D8B030D-6E8A-4147-A177-3AD203B41FA5}">
+                      <a16:colId xmlns:a16="http://schemas.microsoft.com/office/drawing/2014/main" val="20000"/>
+                    </a:ext>
+                  </a:extLst>
+                </a:gridCol>
+                <a:gridCol w="2743200">
+                  <a:extLst>
+                    <a:ext uri="{9D8B030D-6E8A-4147-A177-3AD203B41FA5}">
+                      <a16:colId xmlns:a16="http://schemas.microsoft.com/office/drawing/2014/main" val="20001"/>
+                    </a:ext>
+                  </a:extLst>
+                </a:gridCol>
+                <a:gridCol w="4754880">
+                  <a:extLst>
+                    <a:ext uri="{9D8B030D-6E8A-4147-A177-3AD203B41FA5}">
+                      <a16:colId xmlns:a16="http://schemas.microsoft.com/office/drawing/2014/main" val="20002"/>
+                    </a:ext>
+                  </a:extLst>
+                </a:gridCol>
+                <a:gridCol w="2743200">
+                  <a:extLst>
+                    <a:ext uri="{9D8B030D-6E8A-4147-A177-3AD203B41FA5}">
+                      <a16:colId xmlns:a16="http://schemas.microsoft.com/office/drawing/2014/main" val="20003"/>
+                    </a:ext>
+                  </a:extLst>
+                </a:gridCol>
               </a:tblGrid>
               <a:tr h="310896">
                 <a:tc>
@@ -6909,7 +6843,7 @@
                     <a:bodyPr/>
                     <a:lstStyle/>
                     <a:p>
-                      <a:pPr algn="ctr" indent="0" marL="0">
+                      <a:pPr marL="0" indent="0" algn="ctr">
                         <a:buNone/>
                       </a:pPr>
                       <a:r>
@@ -6930,7 +6864,7 @@
                       </a:endParaRPr>
                     </a:p>
                   </a:txBody>
-                  <a:tcPr marL="91440" marR="91440" marT="45720" marB="45720">
+                  <a:tcPr>
                     <a:lnL w="6350" cap="flat" cmpd="sng" algn="ctr">
                       <a:solidFill>
                         <a:srgbClr val="CCCCCC"/>
@@ -6977,7 +6911,7 @@
                     <a:bodyPr/>
                     <a:lstStyle/>
                     <a:p>
-                      <a:pPr algn="ctr" indent="0" marL="0">
+                      <a:pPr marL="0" indent="0" algn="ctr">
                         <a:buNone/>
                       </a:pPr>
                       <a:r>
@@ -6998,7 +6932,7 @@
                       </a:endParaRPr>
                     </a:p>
                   </a:txBody>
-                  <a:tcPr marL="91440" marR="91440" marT="45720" marB="45720">
+                  <a:tcPr>
                     <a:lnL w="6350" cap="flat" cmpd="sng" algn="ctr">
                       <a:solidFill>
                         <a:srgbClr val="CCCCCC"/>
@@ -7045,7 +6979,7 @@
                     <a:bodyPr/>
                     <a:lstStyle/>
                     <a:p>
-                      <a:pPr algn="ctr" indent="0" marL="0">
+                      <a:pPr marL="0" indent="0" algn="ctr">
                         <a:buNone/>
                       </a:pPr>
                       <a:r>
@@ -7066,7 +7000,7 @@
                       </a:endParaRPr>
                     </a:p>
                   </a:txBody>
-                  <a:tcPr marL="91440" marR="91440" marT="45720" marB="45720">
+                  <a:tcPr>
                     <a:lnL w="6350" cap="flat" cmpd="sng" algn="ctr">
                       <a:solidFill>
                         <a:srgbClr val="CCCCCC"/>
@@ -7113,7 +7047,7 @@
                     <a:bodyPr/>
                     <a:lstStyle/>
                     <a:p>
-                      <a:pPr algn="ctr" indent="0" marL="0">
+                      <a:pPr marL="0" indent="0" algn="ctr">
                         <a:buNone/>
                       </a:pPr>
                       <a:r>
@@ -7134,7 +7068,7 @@
                       </a:endParaRPr>
                     </a:p>
                   </a:txBody>
-                  <a:tcPr marL="91440" marR="91440" marT="45720" marB="45720">
+                  <a:tcPr>
                     <a:lnL w="6350" cap="flat" cmpd="sng" algn="ctr">
                       <a:solidFill>
                         <a:srgbClr val="CCCCCC"/>
@@ -7176,6 +7110,11 @@
                     </a:solidFill>
                   </a:tcPr>
                 </a:tc>
+                <a:extLst>
+                  <a:ext uri="{0D108BD9-81ED-4DB2-BD59-A6C34878D82A}">
+                    <a16:rowId xmlns:a16="http://schemas.microsoft.com/office/drawing/2014/main" val="10000"/>
+                  </a:ext>
+                </a:extLst>
               </a:tr>
               <a:tr h="310896">
                 <a:tc>
@@ -7183,7 +7122,7 @@
                     <a:bodyPr/>
                     <a:lstStyle/>
                     <a:p>
-                      <a:pPr indent="0" marL="0">
+                      <a:pPr marL="0" indent="0">
                         <a:buNone/>
                       </a:pPr>
                       <a:r>
@@ -7204,7 +7143,7 @@
                       </a:endParaRPr>
                     </a:p>
                   </a:txBody>
-                  <a:tcPr marL="91440" marR="91440" marT="45720" marB="45720">
+                  <a:tcPr>
                     <a:lnL w="6350" cap="flat" cmpd="sng" algn="ctr">
                       <a:solidFill>
                         <a:srgbClr val="CCCCCC"/>
@@ -7251,7 +7190,7 @@
                     <a:bodyPr/>
                     <a:lstStyle/>
                     <a:p>
-                      <a:pPr indent="0" marL="0">
+                      <a:pPr marL="0" indent="0">
                         <a:buNone/>
                       </a:pPr>
                       <a:r>
@@ -7272,7 +7211,7 @@
                       </a:endParaRPr>
                     </a:p>
                   </a:txBody>
-                  <a:tcPr marL="91440" marR="91440" marT="45720" marB="45720">
+                  <a:tcPr>
                     <a:lnL w="6350" cap="flat" cmpd="sng" algn="ctr">
                       <a:solidFill>
                         <a:srgbClr val="CCCCCC"/>
@@ -7319,7 +7258,7 @@
                     <a:bodyPr/>
                     <a:lstStyle/>
                     <a:p>
-                      <a:pPr indent="0" marL="0">
+                      <a:pPr marL="0" indent="0">
                         <a:buNone/>
                       </a:pPr>
                       <a:r>
@@ -7340,7 +7279,7 @@
                       </a:endParaRPr>
                     </a:p>
                   </a:txBody>
-                  <a:tcPr marL="91440" marR="91440" marT="45720" marB="45720">
+                  <a:tcPr>
                     <a:lnL w="6350" cap="flat" cmpd="sng" algn="ctr">
                       <a:solidFill>
                         <a:srgbClr val="CCCCCC"/>
@@ -7387,7 +7326,7 @@
                     <a:bodyPr/>
                     <a:lstStyle/>
                     <a:p>
-                      <a:pPr indent="0" marL="0">
+                      <a:pPr marL="0" indent="0">
                         <a:buNone/>
                       </a:pPr>
                       <a:r>
@@ -7408,7 +7347,7 @@
                       </a:endParaRPr>
                     </a:p>
                   </a:txBody>
-                  <a:tcPr marL="91440" marR="91440" marT="45720" marB="45720">
+                  <a:tcPr>
                     <a:lnL w="6350" cap="flat" cmpd="sng" algn="ctr">
                       <a:solidFill>
                         <a:srgbClr val="CCCCCC"/>
@@ -7450,6 +7389,11 @@
                     </a:solidFill>
                   </a:tcPr>
                 </a:tc>
+                <a:extLst>
+                  <a:ext uri="{0D108BD9-81ED-4DB2-BD59-A6C34878D82A}">
+                    <a16:rowId xmlns:a16="http://schemas.microsoft.com/office/drawing/2014/main" val="10001"/>
+                  </a:ext>
+                </a:extLst>
               </a:tr>
               <a:tr h="310896">
                 <a:tc>
@@ -7457,7 +7401,7 @@
                     <a:bodyPr/>
                     <a:lstStyle/>
                     <a:p>
-                      <a:pPr indent="0" marL="0">
+                      <a:pPr marL="0" indent="0">
                         <a:buNone/>
                       </a:pPr>
                       <a:r>
@@ -7478,7 +7422,7 @@
                       </a:endParaRPr>
                     </a:p>
                   </a:txBody>
-                  <a:tcPr marL="91440" marR="91440" marT="45720" marB="45720">
+                  <a:tcPr>
                     <a:lnL w="6350" cap="flat" cmpd="sng" algn="ctr">
                       <a:solidFill>
                         <a:srgbClr val="CCCCCC"/>
@@ -7525,7 +7469,7 @@
                     <a:bodyPr/>
                     <a:lstStyle/>
                     <a:p>
-                      <a:pPr indent="0" marL="0">
+                      <a:pPr marL="0" indent="0">
                         <a:buNone/>
                       </a:pPr>
                       <a:r>
@@ -7546,7 +7490,7 @@
                       </a:endParaRPr>
                     </a:p>
                   </a:txBody>
-                  <a:tcPr marL="91440" marR="91440" marT="45720" marB="45720">
+                  <a:tcPr>
                     <a:lnL w="6350" cap="flat" cmpd="sng" algn="ctr">
                       <a:solidFill>
                         <a:srgbClr val="CCCCCC"/>
@@ -7593,7 +7537,7 @@
                     <a:bodyPr/>
                     <a:lstStyle/>
                     <a:p>
-                      <a:pPr indent="0" marL="0">
+                      <a:pPr marL="0" indent="0">
                         <a:buNone/>
                       </a:pPr>
                       <a:r>
@@ -7614,7 +7558,7 @@
                       </a:endParaRPr>
                     </a:p>
                   </a:txBody>
-                  <a:tcPr marL="91440" marR="91440" marT="45720" marB="45720">
+                  <a:tcPr>
                     <a:lnL w="6350" cap="flat" cmpd="sng" algn="ctr">
                       <a:solidFill>
                         <a:srgbClr val="CCCCCC"/>
@@ -7661,7 +7605,7 @@
                     <a:bodyPr/>
                     <a:lstStyle/>
                     <a:p>
-                      <a:pPr indent="0" marL="0">
+                      <a:pPr marL="0" indent="0">
                         <a:buNone/>
                       </a:pPr>
                       <a:r>
@@ -7682,7 +7626,7 @@
                       </a:endParaRPr>
                     </a:p>
                   </a:txBody>
-                  <a:tcPr marL="91440" marR="91440" marT="45720" marB="45720">
+                  <a:tcPr>
                     <a:lnL w="6350" cap="flat" cmpd="sng" algn="ctr">
                       <a:solidFill>
                         <a:srgbClr val="CCCCCC"/>
@@ -7724,6 +7668,11 @@
                     </a:solidFill>
                   </a:tcPr>
                 </a:tc>
+                <a:extLst>
+                  <a:ext uri="{0D108BD9-81ED-4DB2-BD59-A6C34878D82A}">
+                    <a16:rowId xmlns:a16="http://schemas.microsoft.com/office/drawing/2014/main" val="10002"/>
+                  </a:ext>
+                </a:extLst>
               </a:tr>
               <a:tr h="310896">
                 <a:tc>
@@ -7731,7 +7680,7 @@
                     <a:bodyPr/>
                     <a:lstStyle/>
                     <a:p>
-                      <a:pPr indent="0" marL="0">
+                      <a:pPr marL="0" indent="0">
                         <a:buNone/>
                       </a:pPr>
                       <a:r>
@@ -7752,7 +7701,7 @@
                       </a:endParaRPr>
                     </a:p>
                   </a:txBody>
-                  <a:tcPr marL="91440" marR="91440" marT="45720" marB="45720">
+                  <a:tcPr>
                     <a:lnL w="6350" cap="flat" cmpd="sng" algn="ctr">
                       <a:solidFill>
                         <a:srgbClr val="CCCCCC"/>
@@ -7799,7 +7748,7 @@
                     <a:bodyPr/>
                     <a:lstStyle/>
                     <a:p>
-                      <a:pPr indent="0" marL="0">
+                      <a:pPr marL="0" indent="0">
                         <a:buNone/>
                       </a:pPr>
                       <a:r>
@@ -7820,7 +7769,7 @@
                       </a:endParaRPr>
                     </a:p>
                   </a:txBody>
-                  <a:tcPr marL="91440" marR="91440" marT="45720" marB="45720">
+                  <a:tcPr>
                     <a:lnL w="6350" cap="flat" cmpd="sng" algn="ctr">
                       <a:solidFill>
                         <a:srgbClr val="CCCCCC"/>
@@ -7867,7 +7816,7 @@
                     <a:bodyPr/>
                     <a:lstStyle/>
                     <a:p>
-                      <a:pPr indent="0" marL="0">
+                      <a:pPr marL="0" indent="0">
                         <a:buNone/>
                       </a:pPr>
                       <a:r>
@@ -7888,7 +7837,7 @@
                       </a:endParaRPr>
                     </a:p>
                   </a:txBody>
-                  <a:tcPr marL="91440" marR="91440" marT="45720" marB="45720">
+                  <a:tcPr>
                     <a:lnL w="6350" cap="flat" cmpd="sng" algn="ctr">
                       <a:solidFill>
                         <a:srgbClr val="CCCCCC"/>
@@ -7935,7 +7884,7 @@
                     <a:bodyPr/>
                     <a:lstStyle/>
                     <a:p>
-                      <a:pPr indent="0" marL="0">
+                      <a:pPr marL="0" indent="0">
                         <a:buNone/>
                       </a:pPr>
                       <a:r>
@@ -7956,7 +7905,7 @@
                       </a:endParaRPr>
                     </a:p>
                   </a:txBody>
-                  <a:tcPr marL="91440" marR="91440" marT="45720" marB="45720">
+                  <a:tcPr>
                     <a:lnL w="6350" cap="flat" cmpd="sng" algn="ctr">
                       <a:solidFill>
                         <a:srgbClr val="CCCCCC"/>
@@ -7998,6 +7947,11 @@
                     </a:solidFill>
                   </a:tcPr>
                 </a:tc>
+                <a:extLst>
+                  <a:ext uri="{0D108BD9-81ED-4DB2-BD59-A6C34878D82A}">
+                    <a16:rowId xmlns:a16="http://schemas.microsoft.com/office/drawing/2014/main" val="10003"/>
+                  </a:ext>
+                </a:extLst>
               </a:tr>
               <a:tr h="310896">
                 <a:tc>
@@ -8005,7 +7959,7 @@
                     <a:bodyPr/>
                     <a:lstStyle/>
                     <a:p>
-                      <a:pPr indent="0" marL="0">
+                      <a:pPr marL="0" indent="0">
                         <a:buNone/>
                       </a:pPr>
                       <a:r>
@@ -8026,7 +7980,7 @@
                       </a:endParaRPr>
                     </a:p>
                   </a:txBody>
-                  <a:tcPr marL="91440" marR="91440" marT="45720" marB="45720">
+                  <a:tcPr>
                     <a:lnL w="6350" cap="flat" cmpd="sng" algn="ctr">
                       <a:solidFill>
                         <a:srgbClr val="CCCCCC"/>
@@ -8073,7 +8027,7 @@
                     <a:bodyPr/>
                     <a:lstStyle/>
                     <a:p>
-                      <a:pPr indent="0" marL="0">
+                      <a:pPr marL="0" indent="0">
                         <a:buNone/>
                       </a:pPr>
                       <a:r>
@@ -8094,7 +8048,7 @@
                       </a:endParaRPr>
                     </a:p>
                   </a:txBody>
-                  <a:tcPr marL="91440" marR="91440" marT="45720" marB="45720">
+                  <a:tcPr>
                     <a:lnL w="6350" cap="flat" cmpd="sng" algn="ctr">
                       <a:solidFill>
                         <a:srgbClr val="CCCCCC"/>
@@ -8141,7 +8095,7 @@
                     <a:bodyPr/>
                     <a:lstStyle/>
                     <a:p>
-                      <a:pPr indent="0" marL="0">
+                      <a:pPr marL="0" indent="0">
                         <a:buNone/>
                       </a:pPr>
                       <a:r>
@@ -8162,7 +8116,7 @@
                       </a:endParaRPr>
                     </a:p>
                   </a:txBody>
-                  <a:tcPr marL="91440" marR="91440" marT="45720" marB="45720">
+                  <a:tcPr>
                     <a:lnL w="6350" cap="flat" cmpd="sng" algn="ctr">
                       <a:solidFill>
                         <a:srgbClr val="CCCCCC"/>
@@ -8209,7 +8163,7 @@
                     <a:bodyPr/>
                     <a:lstStyle/>
                     <a:p>
-                      <a:pPr indent="0" marL="0">
+                      <a:pPr marL="0" indent="0">
                         <a:buNone/>
                       </a:pPr>
                       <a:r>
@@ -8230,7 +8184,7 @@
                       </a:endParaRPr>
                     </a:p>
                   </a:txBody>
-                  <a:tcPr marL="91440" marR="91440" marT="45720" marB="45720">
+                  <a:tcPr>
                     <a:lnL w="6350" cap="flat" cmpd="sng" algn="ctr">
                       <a:solidFill>
                         <a:srgbClr val="CCCCCC"/>
@@ -8272,6 +8226,11 @@
                     </a:solidFill>
                   </a:tcPr>
                 </a:tc>
+                <a:extLst>
+                  <a:ext uri="{0D108BD9-81ED-4DB2-BD59-A6C34878D82A}">
+                    <a16:rowId xmlns:a16="http://schemas.microsoft.com/office/drawing/2014/main" val="10004"/>
+                  </a:ext>
+                </a:extLst>
               </a:tr>
               <a:tr h="310896">
                 <a:tc>
@@ -8279,7 +8238,7 @@
                     <a:bodyPr/>
                     <a:lstStyle/>
                     <a:p>
-                      <a:pPr indent="0" marL="0">
+                      <a:pPr marL="0" indent="0">
                         <a:buNone/>
                       </a:pPr>
                       <a:r>
@@ -8300,7 +8259,7 @@
                       </a:endParaRPr>
                     </a:p>
                   </a:txBody>
-                  <a:tcPr marL="91440" marR="91440" marT="45720" marB="45720">
+                  <a:tcPr>
                     <a:lnL w="6350" cap="flat" cmpd="sng" algn="ctr">
                       <a:solidFill>
                         <a:srgbClr val="CCCCCC"/>
@@ -8347,7 +8306,7 @@
                     <a:bodyPr/>
                     <a:lstStyle/>
                     <a:p>
-                      <a:pPr indent="0" marL="0">
+                      <a:pPr marL="0" indent="0">
                         <a:buNone/>
                       </a:pPr>
                       <a:r>
@@ -8368,7 +8327,7 @@
                       </a:endParaRPr>
                     </a:p>
                   </a:txBody>
-                  <a:tcPr marL="91440" marR="91440" marT="45720" marB="45720">
+                  <a:tcPr>
                     <a:lnL w="6350" cap="flat" cmpd="sng" algn="ctr">
                       <a:solidFill>
                         <a:srgbClr val="CCCCCC"/>
@@ -8415,7 +8374,7 @@
                     <a:bodyPr/>
                     <a:lstStyle/>
                     <a:p>
-                      <a:pPr indent="0" marL="0">
+                      <a:pPr marL="0" indent="0">
                         <a:buNone/>
                       </a:pPr>
                       <a:r>
@@ -8436,7 +8395,7 @@
                       </a:endParaRPr>
                     </a:p>
                   </a:txBody>
-                  <a:tcPr marL="91440" marR="91440" marT="45720" marB="45720">
+                  <a:tcPr>
                     <a:lnL w="6350" cap="flat" cmpd="sng" algn="ctr">
                       <a:solidFill>
                         <a:srgbClr val="CCCCCC"/>
@@ -8483,7 +8442,7 @@
                     <a:bodyPr/>
                     <a:lstStyle/>
                     <a:p>
-                      <a:pPr indent="0" marL="0">
+                      <a:pPr marL="0" indent="0">
                         <a:buNone/>
                       </a:pPr>
                       <a:r>
@@ -8504,7 +8463,7 @@
                       </a:endParaRPr>
                     </a:p>
                   </a:txBody>
-                  <a:tcPr marL="91440" marR="91440" marT="45720" marB="45720">
+                  <a:tcPr>
                     <a:lnL w="6350" cap="flat" cmpd="sng" algn="ctr">
                       <a:solidFill>
                         <a:srgbClr val="CCCCCC"/>
@@ -8546,6 +8505,11 @@
                     </a:solidFill>
                   </a:tcPr>
                 </a:tc>
+                <a:extLst>
+                  <a:ext uri="{0D108BD9-81ED-4DB2-BD59-A6C34878D82A}">
+                    <a16:rowId xmlns:a16="http://schemas.microsoft.com/office/drawing/2014/main" val="10005"/>
+                  </a:ext>
+                </a:extLst>
               </a:tr>
               <a:tr h="310896">
                 <a:tc>
@@ -8553,7 +8517,7 @@
                     <a:bodyPr/>
                     <a:lstStyle/>
                     <a:p>
-                      <a:pPr indent="0" marL="0">
+                      <a:pPr marL="0" indent="0">
                         <a:buNone/>
                       </a:pPr>
                       <a:r>
@@ -8574,7 +8538,7 @@
                       </a:endParaRPr>
                     </a:p>
                   </a:txBody>
-                  <a:tcPr marL="91440" marR="91440" marT="45720" marB="45720">
+                  <a:tcPr>
                     <a:lnL w="6350" cap="flat" cmpd="sng" algn="ctr">
                       <a:solidFill>
                         <a:srgbClr val="CCCCCC"/>
@@ -8621,7 +8585,7 @@
                     <a:bodyPr/>
                     <a:lstStyle/>
                     <a:p>
-                      <a:pPr indent="0" marL="0">
+                      <a:pPr marL="0" indent="0">
                         <a:buNone/>
                       </a:pPr>
                       <a:r>
@@ -8642,7 +8606,7 @@
                       </a:endParaRPr>
                     </a:p>
                   </a:txBody>
-                  <a:tcPr marL="91440" marR="91440" marT="45720" marB="45720">
+                  <a:tcPr>
                     <a:lnL w="6350" cap="flat" cmpd="sng" algn="ctr">
                       <a:solidFill>
                         <a:srgbClr val="CCCCCC"/>
@@ -8689,7 +8653,7 @@
                     <a:bodyPr/>
                     <a:lstStyle/>
                     <a:p>
-                      <a:pPr indent="0" marL="0">
+                      <a:pPr marL="0" indent="0">
                         <a:buNone/>
                       </a:pPr>
                       <a:r>
@@ -8710,7 +8674,7 @@
                       </a:endParaRPr>
                     </a:p>
                   </a:txBody>
-                  <a:tcPr marL="91440" marR="91440" marT="45720" marB="45720">
+                  <a:tcPr>
                     <a:lnL w="6350" cap="flat" cmpd="sng" algn="ctr">
                       <a:solidFill>
                         <a:srgbClr val="CCCCCC"/>
@@ -8757,7 +8721,7 @@
                     <a:bodyPr/>
                     <a:lstStyle/>
                     <a:p>
-                      <a:pPr indent="0" marL="0">
+                      <a:pPr marL="0" indent="0">
                         <a:buNone/>
                       </a:pPr>
                       <a:r>
@@ -8778,7 +8742,7 @@
                       </a:endParaRPr>
                     </a:p>
                   </a:txBody>
-                  <a:tcPr marL="91440" marR="91440" marT="45720" marB="45720">
+                  <a:tcPr>
                     <a:lnL w="6350" cap="flat" cmpd="sng" algn="ctr">
                       <a:solidFill>
                         <a:srgbClr val="CCCCCC"/>
@@ -8820,6 +8784,11 @@
                     </a:solidFill>
                   </a:tcPr>
                 </a:tc>
+                <a:extLst>
+                  <a:ext uri="{0D108BD9-81ED-4DB2-BD59-A6C34878D82A}">
+                    <a16:rowId xmlns:a16="http://schemas.microsoft.com/office/drawing/2014/main" val="10006"/>
+                  </a:ext>
+                </a:extLst>
               </a:tr>
               <a:tr h="310896">
                 <a:tc>
@@ -8827,7 +8796,7 @@
                     <a:bodyPr/>
                     <a:lstStyle/>
                     <a:p>
-                      <a:pPr indent="0" marL="0">
+                      <a:pPr marL="0" indent="0">
                         <a:buNone/>
                       </a:pPr>
                       <a:r>
@@ -8848,7 +8817,7 @@
                       </a:endParaRPr>
                     </a:p>
                   </a:txBody>
-                  <a:tcPr marL="91440" marR="91440" marT="45720" marB="45720">
+                  <a:tcPr>
                     <a:lnL w="6350" cap="flat" cmpd="sng" algn="ctr">
                       <a:solidFill>
                         <a:srgbClr val="CCCCCC"/>
@@ -8895,7 +8864,7 @@
                     <a:bodyPr/>
                     <a:lstStyle/>
                     <a:p>
-                      <a:pPr indent="0" marL="0">
+                      <a:pPr marL="0" indent="0">
                         <a:buNone/>
                       </a:pPr>
                       <a:r>
@@ -8916,7 +8885,7 @@
                       </a:endParaRPr>
                     </a:p>
                   </a:txBody>
-                  <a:tcPr marL="91440" marR="91440" marT="45720" marB="45720">
+                  <a:tcPr>
                     <a:lnL w="6350" cap="flat" cmpd="sng" algn="ctr">
                       <a:solidFill>
                         <a:srgbClr val="CCCCCC"/>
@@ -8963,7 +8932,7 @@
                     <a:bodyPr/>
                     <a:lstStyle/>
                     <a:p>
-                      <a:pPr indent="0" marL="0">
+                      <a:pPr marL="0" indent="0">
                         <a:buNone/>
                       </a:pPr>
                       <a:r>
@@ -8984,7 +8953,7 @@
                       </a:endParaRPr>
                     </a:p>
                   </a:txBody>
-                  <a:tcPr marL="91440" marR="91440" marT="45720" marB="45720">
+                  <a:tcPr>
                     <a:lnL w="6350" cap="flat" cmpd="sng" algn="ctr">
                       <a:solidFill>
                         <a:srgbClr val="CCCCCC"/>
@@ -9031,7 +9000,7 @@
                     <a:bodyPr/>
                     <a:lstStyle/>
                     <a:p>
-                      <a:pPr indent="0" marL="0">
+                      <a:pPr marL="0" indent="0">
                         <a:buNone/>
                       </a:pPr>
                       <a:r>
@@ -9052,7 +9021,7 @@
                       </a:endParaRPr>
                     </a:p>
                   </a:txBody>
-                  <a:tcPr marL="91440" marR="91440" marT="45720" marB="45720">
+                  <a:tcPr>
                     <a:lnL w="6350" cap="flat" cmpd="sng" algn="ctr">
                       <a:solidFill>
                         <a:srgbClr val="CCCCCC"/>
@@ -9094,6 +9063,11 @@
                     </a:solidFill>
                   </a:tcPr>
                 </a:tc>
+                <a:extLst>
+                  <a:ext uri="{0D108BD9-81ED-4DB2-BD59-A6C34878D82A}">
+                    <a16:rowId xmlns:a16="http://schemas.microsoft.com/office/drawing/2014/main" val="10007"/>
+                  </a:ext>
+                </a:extLst>
               </a:tr>
               <a:tr h="310896">
                 <a:tc>
@@ -9101,7 +9075,7 @@
                     <a:bodyPr/>
                     <a:lstStyle/>
                     <a:p>
-                      <a:pPr indent="0" marL="0">
+                      <a:pPr marL="0" indent="0">
                         <a:buNone/>
                       </a:pPr>
                       <a:r>
@@ -9122,7 +9096,7 @@
                       </a:endParaRPr>
                     </a:p>
                   </a:txBody>
-                  <a:tcPr marL="91440" marR="91440" marT="45720" marB="45720">
+                  <a:tcPr>
                     <a:lnL w="6350" cap="flat" cmpd="sng" algn="ctr">
                       <a:solidFill>
                         <a:srgbClr val="CCCCCC"/>
@@ -9169,7 +9143,7 @@
                     <a:bodyPr/>
                     <a:lstStyle/>
                     <a:p>
-                      <a:pPr indent="0" marL="0">
+                      <a:pPr marL="0" indent="0">
                         <a:buNone/>
                       </a:pPr>
                       <a:r>
@@ -9190,7 +9164,7 @@
                       </a:endParaRPr>
                     </a:p>
                   </a:txBody>
-                  <a:tcPr marL="91440" marR="91440" marT="45720" marB="45720">
+                  <a:tcPr>
                     <a:lnL w="6350" cap="flat" cmpd="sng" algn="ctr">
                       <a:solidFill>
                         <a:srgbClr val="CCCCCC"/>
@@ -9237,7 +9211,7 @@
                     <a:bodyPr/>
                     <a:lstStyle/>
                     <a:p>
-                      <a:pPr indent="0" marL="0">
+                      <a:pPr marL="0" indent="0">
                         <a:buNone/>
                       </a:pPr>
                       <a:r>
@@ -9258,7 +9232,7 @@
                       </a:endParaRPr>
                     </a:p>
                   </a:txBody>
-                  <a:tcPr marL="91440" marR="91440" marT="45720" marB="45720">
+                  <a:tcPr>
                     <a:lnL w="6350" cap="flat" cmpd="sng" algn="ctr">
                       <a:solidFill>
                         <a:srgbClr val="CCCCCC"/>
@@ -9305,7 +9279,7 @@
                     <a:bodyPr/>
                     <a:lstStyle/>
                     <a:p>
-                      <a:pPr indent="0" marL="0">
+                      <a:pPr marL="0" indent="0">
                         <a:buNone/>
                       </a:pPr>
                       <a:r>
@@ -9326,7 +9300,7 @@
                       </a:endParaRPr>
                     </a:p>
                   </a:txBody>
-                  <a:tcPr marL="91440" marR="91440" marT="45720" marB="45720">
+                  <a:tcPr>
                     <a:lnL w="6350" cap="flat" cmpd="sng" algn="ctr">
                       <a:solidFill>
                         <a:srgbClr val="CCCCCC"/>
@@ -9368,6 +9342,11 @@
                     </a:solidFill>
                   </a:tcPr>
                 </a:tc>
+                <a:extLst>
+                  <a:ext uri="{0D108BD9-81ED-4DB2-BD59-A6C34878D82A}">
+                    <a16:rowId xmlns:a16="http://schemas.microsoft.com/office/drawing/2014/main" val="10008"/>
+                  </a:ext>
+                </a:extLst>
               </a:tr>
               <a:tr h="310896">
                 <a:tc>
@@ -9375,7 +9354,7 @@
                     <a:bodyPr/>
                     <a:lstStyle/>
                     <a:p>
-                      <a:pPr indent="0" marL="0">
+                      <a:pPr marL="0" indent="0">
                         <a:buNone/>
                       </a:pPr>
                       <a:r>
@@ -9396,7 +9375,7 @@
                       </a:endParaRPr>
                     </a:p>
                   </a:txBody>
-                  <a:tcPr marL="91440" marR="91440" marT="45720" marB="45720">
+                  <a:tcPr>
                     <a:lnL w="6350" cap="flat" cmpd="sng" algn="ctr">
                       <a:solidFill>
                         <a:srgbClr val="CCCCCC"/>
@@ -9443,7 +9422,7 @@
                     <a:bodyPr/>
                     <a:lstStyle/>
                     <a:p>
-                      <a:pPr indent="0" marL="0">
+                      <a:pPr marL="0" indent="0">
                         <a:buNone/>
                       </a:pPr>
                       <a:r>
@@ -9464,7 +9443,7 @@
                       </a:endParaRPr>
                     </a:p>
                   </a:txBody>
-                  <a:tcPr marL="91440" marR="91440" marT="45720" marB="45720">
+                  <a:tcPr>
                     <a:lnL w="6350" cap="flat" cmpd="sng" algn="ctr">
                       <a:solidFill>
                         <a:srgbClr val="CCCCCC"/>
@@ -9511,7 +9490,7 @@
                     <a:bodyPr/>
                     <a:lstStyle/>
                     <a:p>
-                      <a:pPr indent="0" marL="0">
+                      <a:pPr marL="0" indent="0">
                         <a:buNone/>
                       </a:pPr>
                       <a:r>
@@ -9532,7 +9511,7 @@
                       </a:endParaRPr>
                     </a:p>
                   </a:txBody>
-                  <a:tcPr marL="91440" marR="91440" marT="45720" marB="45720">
+                  <a:tcPr>
                     <a:lnL w="6350" cap="flat" cmpd="sng" algn="ctr">
                       <a:solidFill>
                         <a:srgbClr val="CCCCCC"/>
@@ -9579,7 +9558,7 @@
                     <a:bodyPr/>
                     <a:lstStyle/>
                     <a:p>
-                      <a:pPr indent="0" marL="0">
+                      <a:pPr marL="0" indent="0">
                         <a:buNone/>
                       </a:pPr>
                       <a:r>
@@ -9600,7 +9579,7 @@
                       </a:endParaRPr>
                     </a:p>
                   </a:txBody>
-                  <a:tcPr marL="91440" marR="91440" marT="45720" marB="45720">
+                  <a:tcPr>
                     <a:lnL w="6350" cap="flat" cmpd="sng" algn="ctr">
                       <a:solidFill>
                         <a:srgbClr val="CCCCCC"/>
@@ -9642,6 +9621,11 @@
                     </a:solidFill>
                   </a:tcPr>
                 </a:tc>
+                <a:extLst>
+                  <a:ext uri="{0D108BD9-81ED-4DB2-BD59-A6C34878D82A}">
+                    <a16:rowId xmlns:a16="http://schemas.microsoft.com/office/drawing/2014/main" val="10009"/>
+                  </a:ext>
+                </a:extLst>
               </a:tr>
               <a:tr h="310896">
                 <a:tc>
@@ -9649,7 +9633,7 @@
                     <a:bodyPr/>
                     <a:lstStyle/>
                     <a:p>
-                      <a:pPr indent="0" marL="0">
+                      <a:pPr marL="0" indent="0">
                         <a:buNone/>
                       </a:pPr>
                       <a:r>
@@ -9670,7 +9654,7 @@
                       </a:endParaRPr>
                     </a:p>
                   </a:txBody>
-                  <a:tcPr marL="91440" marR="91440" marT="45720" marB="45720">
+                  <a:tcPr>
                     <a:lnL w="6350" cap="flat" cmpd="sng" algn="ctr">
                       <a:solidFill>
                         <a:srgbClr val="CCCCCC"/>
@@ -9717,7 +9701,7 @@
                     <a:bodyPr/>
                     <a:lstStyle/>
                     <a:p>
-                      <a:pPr indent="0" marL="0">
+                      <a:pPr marL="0" indent="0">
                         <a:buNone/>
                       </a:pPr>
                       <a:r>
@@ -9738,7 +9722,7 @@
                       </a:endParaRPr>
                     </a:p>
                   </a:txBody>
-                  <a:tcPr marL="91440" marR="91440" marT="45720" marB="45720">
+                  <a:tcPr>
                     <a:lnL w="6350" cap="flat" cmpd="sng" algn="ctr">
                       <a:solidFill>
                         <a:srgbClr val="CCCCCC"/>
@@ -9785,7 +9769,7 @@
                     <a:bodyPr/>
                     <a:lstStyle/>
                     <a:p>
-                      <a:pPr indent="0" marL="0">
+                      <a:pPr marL="0" indent="0">
                         <a:buNone/>
                       </a:pPr>
                       <a:r>
@@ -9806,7 +9790,7 @@
                       </a:endParaRPr>
                     </a:p>
                   </a:txBody>
-                  <a:tcPr marL="91440" marR="91440" marT="45720" marB="45720">
+                  <a:tcPr>
                     <a:lnL w="6350" cap="flat" cmpd="sng" algn="ctr">
                       <a:solidFill>
                         <a:srgbClr val="CCCCCC"/>
@@ -9853,7 +9837,7 @@
                     <a:bodyPr/>
                     <a:lstStyle/>
                     <a:p>
-                      <a:pPr indent="0" marL="0">
+                      <a:pPr marL="0" indent="0">
                         <a:buNone/>
                       </a:pPr>
                       <a:r>
@@ -9874,7 +9858,7 @@
                       </a:endParaRPr>
                     </a:p>
                   </a:txBody>
-                  <a:tcPr marL="91440" marR="91440" marT="45720" marB="45720">
+                  <a:tcPr>
                     <a:lnL w="6350" cap="flat" cmpd="sng" algn="ctr">
                       <a:solidFill>
                         <a:srgbClr val="CCCCCC"/>
@@ -9916,6 +9900,11 @@
                     </a:solidFill>
                   </a:tcPr>
                 </a:tc>
+                <a:extLst>
+                  <a:ext uri="{0D108BD9-81ED-4DB2-BD59-A6C34878D82A}">
+                    <a16:rowId xmlns:a16="http://schemas.microsoft.com/office/drawing/2014/main" val="10010"/>
+                  </a:ext>
+                </a:extLst>
               </a:tr>
               <a:tr h="310896">
                 <a:tc>
@@ -9923,7 +9912,7 @@
                     <a:bodyPr/>
                     <a:lstStyle/>
                     <a:p>
-                      <a:pPr indent="0" marL="0">
+                      <a:pPr marL="0" indent="0">
                         <a:buNone/>
                       </a:pPr>
                       <a:r>
@@ -9944,7 +9933,7 @@
                       </a:endParaRPr>
                     </a:p>
                   </a:txBody>
-                  <a:tcPr marL="91440" marR="91440" marT="45720" marB="45720">
+                  <a:tcPr>
                     <a:lnL w="6350" cap="flat" cmpd="sng" algn="ctr">
                       <a:solidFill>
                         <a:srgbClr val="CCCCCC"/>
@@ -9991,7 +9980,7 @@
                     <a:bodyPr/>
                     <a:lstStyle/>
                     <a:p>
-                      <a:pPr indent="0" marL="0">
+                      <a:pPr marL="0" indent="0">
                         <a:buNone/>
                       </a:pPr>
                       <a:r>
@@ -10012,7 +10001,7 @@
                       </a:endParaRPr>
                     </a:p>
                   </a:txBody>
-                  <a:tcPr marL="91440" marR="91440" marT="45720" marB="45720">
+                  <a:tcPr>
                     <a:lnL w="6350" cap="flat" cmpd="sng" algn="ctr">
                       <a:solidFill>
                         <a:srgbClr val="CCCCCC"/>
@@ -10059,7 +10048,7 @@
                     <a:bodyPr/>
                     <a:lstStyle/>
                     <a:p>
-                      <a:pPr indent="0" marL="0">
+                      <a:pPr marL="0" indent="0">
                         <a:buNone/>
                       </a:pPr>
                       <a:r>
@@ -10080,7 +10069,7 @@
                       </a:endParaRPr>
                     </a:p>
                   </a:txBody>
-                  <a:tcPr marL="91440" marR="91440" marT="45720" marB="45720">
+                  <a:tcPr>
                     <a:lnL w="6350" cap="flat" cmpd="sng" algn="ctr">
                       <a:solidFill>
                         <a:srgbClr val="CCCCCC"/>
@@ -10127,7 +10116,7 @@
                     <a:bodyPr/>
                     <a:lstStyle/>
                     <a:p>
-                      <a:pPr indent="0" marL="0">
+                      <a:pPr marL="0" indent="0">
                         <a:buNone/>
                       </a:pPr>
                       <a:r>
@@ -10148,7 +10137,7 @@
                       </a:endParaRPr>
                     </a:p>
                   </a:txBody>
-                  <a:tcPr marL="91440" marR="91440" marT="45720" marB="45720">
+                  <a:tcPr>
                     <a:lnL w="6350" cap="flat" cmpd="sng" algn="ctr">
                       <a:solidFill>
                         <a:srgbClr val="CCCCCC"/>
@@ -10190,6 +10179,11 @@
                     </a:solidFill>
                   </a:tcPr>
                 </a:tc>
+                <a:extLst>
+                  <a:ext uri="{0D108BD9-81ED-4DB2-BD59-A6C34878D82A}">
+                    <a16:rowId xmlns:a16="http://schemas.microsoft.com/office/drawing/2014/main" val="10011"/>
+                  </a:ext>
+                </a:extLst>
               </a:tr>
             </a:tbl>
           </a:graphicData>
@@ -10216,7 +10210,7 @@
           <a:bodyPr wrap="square" rtlCol="0" anchor="ctr"/>
           <a:lstStyle/>
           <a:p>
-            <a:pPr indent="0" marL="0">
+            <a:pPr marL="0" indent="0">
               <a:buNone/>
             </a:pPr>
             <a:r>
@@ -10282,7 +10276,7 @@
           <a:bodyPr wrap="square" rtlCol="0" anchor="ctr"/>
           <a:lstStyle/>
           <a:p>
-            <a:pPr algn="ctr" indent="0" marL="0">
+            <a:pPr marL="0" indent="0" algn="ctr">
               <a:buNone/>
             </a:pPr>
             <a:r>
@@ -10321,7 +10315,7 @@
           <a:bodyPr wrap="square" rtlCol="0" anchor="ctr"/>
           <a:lstStyle/>
           <a:p>
-            <a:pPr algn="ctr" indent="0" marL="0">
+            <a:pPr marL="0" indent="0" algn="ctr">
               <a:buNone/>
             </a:pPr>
             <a:r>
@@ -10387,7 +10381,7 @@
           <a:bodyPr wrap="square" rtlCol="0" anchor="ctr"/>
           <a:lstStyle/>
           <a:p>
-            <a:pPr algn="ctr" indent="0" marL="0">
+            <a:pPr marL="0" indent="0" algn="ctr">
               <a:buNone/>
             </a:pPr>
             <a:r>
@@ -10426,7 +10420,7 @@
           <a:bodyPr wrap="square" rtlCol="0" anchor="ctr"/>
           <a:lstStyle/>
           <a:p>
-            <a:pPr algn="ctr" indent="0" marL="0">
+            <a:pPr marL="0" indent="0" algn="ctr">
               <a:buNone/>
             </a:pPr>
             <a:r>
@@ -10473,7 +10467,7 @@
       </p:sp>
       <p:sp>
         <p:nvSpPr>
-          <p:cNvPr id="14" name="Text 11"/>
+          <p:cNvPr id="5" name="Text 11"/>
           <p:cNvSpPr/>
           <p:nvPr/>
         </p:nvSpPr>
@@ -10492,7 +10486,7 @@
           <a:bodyPr wrap="square" rtlCol="0" anchor="ctr"/>
           <a:lstStyle/>
           <a:p>
-            <a:pPr algn="ctr" indent="0" marL="0">
+            <a:pPr marL="0" indent="0" algn="ctr">
               <a:buNone/>
             </a:pPr>
             <a:r>
@@ -10531,7 +10525,7 @@
           <a:bodyPr wrap="square" rtlCol="0" anchor="ctr"/>
           <a:lstStyle/>
           <a:p>
-            <a:pPr algn="ctr" indent="0" marL="0">
+            <a:pPr marL="0" indent="0" algn="ctr">
               <a:buNone/>
             </a:pPr>
             <a:r>
@@ -10597,7 +10591,7 @@
           <a:bodyPr wrap="square" rtlCol="0" anchor="ctr"/>
           <a:lstStyle/>
           <a:p>
-            <a:pPr algn="ctr" indent="0" marL="0">
+            <a:pPr marL="0" indent="0" algn="ctr">
               <a:buNone/>
             </a:pPr>
             <a:r>
@@ -10636,7 +10630,7 @@
           <a:bodyPr wrap="square" rtlCol="0" anchor="ctr"/>
           <a:lstStyle/>
           <a:p>
-            <a:pPr algn="ctr" indent="0" marL="0">
+            <a:pPr marL="0" indent="0" algn="ctr">
               <a:buNone/>
             </a:pPr>
             <a:r>
@@ -10740,7 +10734,7 @@
           <a:bodyPr wrap="square" rtlCol="0" anchor="ctr"/>
           <a:lstStyle/>
           <a:p>
-            <a:pPr indent="0" marL="0">
+            <a:pPr marL="0" indent="0">
               <a:buNone/>
             </a:pPr>
             <a:r>
@@ -10826,7 +10820,7 @@
           <a:bodyPr wrap="square" rtlCol="0" anchor="ctr"/>
           <a:lstStyle/>
           <a:p>
-            <a:pPr algn="ctr" indent="0" marL="0">
+            <a:pPr marL="0" indent="0" algn="ctr">
               <a:buNone/>
             </a:pPr>
             <a:r>
@@ -10865,7 +10859,7 @@
           <a:bodyPr wrap="square" rtlCol="0" anchor="ctr"/>
           <a:lstStyle/>
           <a:p>
-            <a:pPr indent="0" marL="0">
+            <a:pPr marL="0" indent="0">
               <a:buNone/>
             </a:pPr>
             <a:r>
@@ -10904,7 +10898,7 @@
           <a:bodyPr wrap="square" rtlCol="0" anchor="ctr"/>
           <a:lstStyle/>
           <a:p>
-            <a:pPr indent="0" marL="0">
+            <a:pPr marL="0" indent="0">
               <a:buNone/>
             </a:pPr>
             <a:r>
@@ -10943,7 +10937,7 @@
           <a:bodyPr wrap="square" rtlCol="0" anchor="ctr"/>
           <a:lstStyle/>
           <a:p>
-            <a:pPr indent="0" marL="0">
+            <a:pPr marL="0" indent="0">
               <a:buNone/>
             </a:pPr>
             <a:r>
@@ -10982,7 +10976,7 @@
           <a:bodyPr wrap="square" rtlCol="0" anchor="ctr"/>
           <a:lstStyle/>
           <a:p>
-            <a:pPr indent="0" marL="0">
+            <a:pPr marL="0" indent="0">
               <a:buNone/>
             </a:pPr>
             <a:r>
@@ -11021,7 +11015,7 @@
           <a:bodyPr wrap="square" rtlCol="0" anchor="ctr"/>
           <a:lstStyle/>
           <a:p>
-            <a:pPr indent="0" marL="0">
+            <a:pPr marL="0" indent="0">
               <a:buNone/>
             </a:pPr>
             <a:r>
@@ -11107,7 +11101,7 @@
           <a:bodyPr wrap="square" rtlCol="0" anchor="ctr"/>
           <a:lstStyle/>
           <a:p>
-            <a:pPr algn="ctr" indent="0" marL="0">
+            <a:pPr marL="0" indent="0" algn="ctr">
               <a:buNone/>
             </a:pPr>
             <a:r>
@@ -11146,7 +11140,7 @@
           <a:bodyPr wrap="square" rtlCol="0" anchor="ctr"/>
           <a:lstStyle/>
           <a:p>
-            <a:pPr indent="0" marL="0">
+            <a:pPr marL="0" indent="0">
               <a:buNone/>
             </a:pPr>
             <a:r>
@@ -11185,7 +11179,7 @@
           <a:bodyPr wrap="square" rtlCol="0" anchor="ctr"/>
           <a:lstStyle/>
           <a:p>
-            <a:pPr indent="0" marL="0">
+            <a:pPr marL="0" indent="0">
               <a:buNone/>
             </a:pPr>
             <a:r>
@@ -11224,7 +11218,7 @@
           <a:bodyPr wrap="square" rtlCol="0" anchor="ctr"/>
           <a:lstStyle/>
           <a:p>
-            <a:pPr indent="0" marL="0">
+            <a:pPr marL="0" indent="0">
               <a:buNone/>
             </a:pPr>
             <a:r>
@@ -11263,7 +11257,7 @@
           <a:bodyPr wrap="square" rtlCol="0" anchor="ctr"/>
           <a:lstStyle/>
           <a:p>
-            <a:pPr indent="0" marL="0">
+            <a:pPr marL="0" indent="0">
               <a:buNone/>
             </a:pPr>
             <a:r>
@@ -11302,7 +11296,7 @@
           <a:bodyPr wrap="square" rtlCol="0" anchor="ctr"/>
           <a:lstStyle/>
           <a:p>
-            <a:pPr indent="0" marL="0">
+            <a:pPr marL="0" indent="0">
               <a:buNone/>
             </a:pPr>
             <a:r>
@@ -11388,7 +11382,7 @@
           <a:bodyPr wrap="square" rtlCol="0" anchor="ctr"/>
           <a:lstStyle/>
           <a:p>
-            <a:pPr algn="ctr" indent="0" marL="0">
+            <a:pPr marL="0" indent="0" algn="ctr">
               <a:buNone/>
             </a:pPr>
             <a:r>
@@ -11427,7 +11421,7 @@
           <a:bodyPr wrap="square" rtlCol="0" anchor="ctr"/>
           <a:lstStyle/>
           <a:p>
-            <a:pPr indent="0" marL="0">
+            <a:pPr marL="0" indent="0">
               <a:buNone/>
             </a:pPr>
             <a:r>
@@ -11466,7 +11460,7 @@
           <a:bodyPr wrap="square" rtlCol="0" anchor="ctr"/>
           <a:lstStyle/>
           <a:p>
-            <a:pPr indent="0" marL="0">
+            <a:pPr marL="0" indent="0">
               <a:buNone/>
             </a:pPr>
             <a:r>
@@ -11505,7 +11499,7 @@
           <a:bodyPr wrap="square" rtlCol="0" anchor="ctr"/>
           <a:lstStyle/>
           <a:p>
-            <a:pPr indent="0" marL="0">
+            <a:pPr marL="0" indent="0">
               <a:buNone/>
             </a:pPr>
             <a:r>
@@ -11544,7 +11538,7 @@
           <a:bodyPr wrap="square" rtlCol="0" anchor="ctr"/>
           <a:lstStyle/>
           <a:p>
-            <a:pPr indent="0" marL="0">
+            <a:pPr marL="0" indent="0">
               <a:buNone/>
             </a:pPr>
             <a:r>
@@ -11583,7 +11577,7 @@
           <a:bodyPr wrap="square" rtlCol="0" anchor="ctr"/>
           <a:lstStyle/>
           <a:p>
-            <a:pPr indent="0" marL="0">
+            <a:pPr marL="0" indent="0">
               <a:buNone/>
             </a:pPr>
             <a:r>
@@ -11669,7 +11663,7 @@
           <a:bodyPr wrap="square" rtlCol="0" anchor="ctr"/>
           <a:lstStyle/>
           <a:p>
-            <a:pPr algn="ctr" indent="0" marL="0">
+            <a:pPr marL="0" indent="0" algn="ctr">
               <a:buNone/>
             </a:pPr>
             <a:r>
@@ -11708,7 +11702,7 @@
           <a:bodyPr wrap="square" rtlCol="0" anchor="ctr"/>
           <a:lstStyle/>
           <a:p>
-            <a:pPr indent="0" marL="0">
+            <a:pPr marL="0" indent="0">
               <a:buNone/>
             </a:pPr>
             <a:r>
@@ -11747,7 +11741,7 @@
           <a:bodyPr wrap="square" rtlCol="0" anchor="ctr"/>
           <a:lstStyle/>
           <a:p>
-            <a:pPr indent="0" marL="0">
+            <a:pPr marL="0" indent="0">
               <a:buNone/>
             </a:pPr>
             <a:r>
@@ -11786,7 +11780,7 @@
           <a:bodyPr wrap="square" rtlCol="0" anchor="ctr"/>
           <a:lstStyle/>
           <a:p>
-            <a:pPr indent="0" marL="0">
+            <a:pPr marL="0" indent="0">
               <a:buNone/>
             </a:pPr>
             <a:r>
@@ -11825,7 +11819,7 @@
           <a:bodyPr wrap="square" rtlCol="0" anchor="ctr"/>
           <a:lstStyle/>
           <a:p>
-            <a:pPr indent="0" marL="0">
+            <a:pPr marL="0" indent="0">
               <a:buNone/>
             </a:pPr>
             <a:r>
@@ -11864,7 +11858,7 @@
           <a:bodyPr wrap="square" rtlCol="0" anchor="ctr"/>
           <a:lstStyle/>
           <a:p>
-            <a:pPr indent="0" marL="0">
+            <a:pPr marL="0" indent="0">
               <a:buNone/>
             </a:pPr>
             <a:r>
@@ -11968,7 +11962,7 @@
           <a:bodyPr wrap="square" rtlCol="0" anchor="ctr"/>
           <a:lstStyle/>
           <a:p>
-            <a:pPr algn="ctr" indent="0" marL="0">
+            <a:pPr marL="0" indent="0" algn="ctr">
               <a:buNone/>
             </a:pPr>
             <a:r>
@@ -12004,7 +11998,7 @@
           <a:bodyPr wrap="square" rtlCol="0" anchor="ctr"/>
           <a:lstStyle/>
           <a:p>
-            <a:pPr algn="ctr" indent="0" marL="0">
+            <a:pPr marL="0" indent="0" algn="ctr">
               <a:buNone/>
             </a:pPr>
             <a:r>
@@ -12043,7 +12037,7 @@
           <a:bodyPr wrap="square" rtlCol="0" anchor="ctr"/>
           <a:lstStyle/>
           <a:p>
-            <a:pPr algn="ctr" indent="0" marL="0">
+            <a:pPr marL="0" indent="0" algn="ctr">
               <a:buNone/>
             </a:pPr>
             <a:r>
@@ -12060,7 +12054,7 @@
             <a:endParaRPr lang="en-US" sz="1700" dirty="0"/>
           </a:p>
           <a:p>
-            <a:pPr algn="ctr" indent="0" marL="0">
+            <a:pPr marL="0" indent="0" algn="ctr">
               <a:buNone/>
             </a:pPr>
             <a:r>
@@ -12119,7 +12113,7 @@
           <a:bodyPr wrap="square" rtlCol="0" anchor="ctr"/>
           <a:lstStyle/>
           <a:p>
-            <a:pPr algn="ctr" indent="0" marL="0">
+            <a:pPr marL="0" indent="0" algn="ctr">
               <a:buNone/>
             </a:pPr>
             <a:r>
@@ -12158,7 +12152,7 @@
           <a:bodyPr wrap="square" rtlCol="0" anchor="ctr"/>
           <a:lstStyle/>
           <a:p>
-            <a:pPr algn="ctr" indent="0" marL="0">
+            <a:pPr marL="0" indent="0" algn="ctr">
               <a:buNone/>
             </a:pPr>
             <a:r>
@@ -12197,7 +12191,7 @@
           <a:bodyPr wrap="square" rtlCol="0" anchor="ctr"/>
           <a:lstStyle/>
           <a:p>
-            <a:pPr algn="ctr" indent="0" marL="0">
+            <a:pPr marL="0" indent="0" algn="ctr">
               <a:buNone/>
             </a:pPr>
             <a:r>
@@ -12236,7 +12230,7 @@
           <a:bodyPr wrap="square" rtlCol="0" anchor="ctr"/>
           <a:lstStyle/>
           <a:p>
-            <a:pPr algn="ctr" indent="0" marL="0">
+            <a:pPr marL="0" indent="0" algn="ctr">
               <a:buNone/>
             </a:pPr>
             <a:r>
@@ -12275,7 +12269,7 @@
           <a:bodyPr wrap="square" rtlCol="0" anchor="ctr"/>
           <a:lstStyle/>
           <a:p>
-            <a:pPr algn="ctr" indent="0" marL="0">
+            <a:pPr marL="0" indent="0" algn="ctr">
               <a:buNone/>
             </a:pPr>
             <a:r>
@@ -12287,7 +12281,7 @@
                 <a:ea typeface="Segoe UI" pitchFamily="34" charset="-122"/>
                 <a:cs typeface="Segoe UI" pitchFamily="34" charset="-120"/>
               </a:rPr>
-              <a:t>Alfa Conseil  •  2024  •  Tous droits réservés</a:t>
+              <a:t>Alfa Conseil  •  Tous droits réservés</a:t>
             </a:r>
             <a:endParaRPr lang="en-US" sz="1200" dirty="0"/>
           </a:p>
@@ -12379,7 +12373,7 @@
           <a:bodyPr wrap="square" rtlCol="0" anchor="ctr"/>
           <a:lstStyle/>
           <a:p>
-            <a:pPr indent="0" marL="0">
+            <a:pPr marL="0" indent="0">
               <a:buNone/>
             </a:pPr>
             <a:r>
@@ -12472,7 +12466,7 @@
           <a:bodyPr wrap="square" rtlCol="0" anchor="ctr"/>
           <a:lstStyle/>
           <a:p>
-            <a:pPr algn="ctr" indent="0" marL="0">
+            <a:pPr marL="0" indent="0" algn="ctr">
               <a:buNone/>
             </a:pPr>
             <a:r>
@@ -12511,7 +12505,7 @@
           <a:bodyPr wrap="square" rtlCol="0" anchor="ctr"/>
           <a:lstStyle/>
           <a:p>
-            <a:pPr indent="0" marL="0">
+            <a:pPr marL="0" indent="0">
               <a:buNone/>
             </a:pPr>
             <a:r>
@@ -12604,7 +12598,7 @@
           <a:bodyPr wrap="square" rtlCol="0" anchor="ctr"/>
           <a:lstStyle/>
           <a:p>
-            <a:pPr algn="ctr" indent="0" marL="0">
+            <a:pPr marL="0" indent="0" algn="ctr">
               <a:buNone/>
             </a:pPr>
             <a:r>
@@ -12643,7 +12637,7 @@
           <a:bodyPr wrap="square" rtlCol="0" anchor="ctr"/>
           <a:lstStyle/>
           <a:p>
-            <a:pPr indent="0" marL="0">
+            <a:pPr marL="0" indent="0">
               <a:buNone/>
             </a:pPr>
             <a:r>
@@ -12736,7 +12730,7 @@
           <a:bodyPr wrap="square" rtlCol="0" anchor="ctr"/>
           <a:lstStyle/>
           <a:p>
-            <a:pPr algn="ctr" indent="0" marL="0">
+            <a:pPr marL="0" indent="0" algn="ctr">
               <a:buNone/>
             </a:pPr>
             <a:r>
@@ -12775,7 +12769,7 @@
           <a:bodyPr wrap="square" rtlCol="0" anchor="ctr"/>
           <a:lstStyle/>
           <a:p>
-            <a:pPr indent="0" marL="0">
+            <a:pPr marL="0" indent="0">
               <a:buNone/>
             </a:pPr>
             <a:r>
@@ -12868,7 +12862,7 @@
           <a:bodyPr wrap="square" rtlCol="0" anchor="ctr"/>
           <a:lstStyle/>
           <a:p>
-            <a:pPr algn="ctr" indent="0" marL="0">
+            <a:pPr marL="0" indent="0" algn="ctr">
               <a:buNone/>
             </a:pPr>
             <a:r>
@@ -12907,7 +12901,7 @@
           <a:bodyPr wrap="square" rtlCol="0" anchor="ctr"/>
           <a:lstStyle/>
           <a:p>
-            <a:pPr indent="0" marL="0">
+            <a:pPr marL="0" indent="0">
               <a:buNone/>
             </a:pPr>
             <a:r>
@@ -13000,7 +12994,7 @@
           <a:bodyPr wrap="square" rtlCol="0" anchor="ctr"/>
           <a:lstStyle/>
           <a:p>
-            <a:pPr algn="ctr" indent="0" marL="0">
+            <a:pPr marL="0" indent="0" algn="ctr">
               <a:buNone/>
             </a:pPr>
             <a:r>
@@ -13039,7 +13033,7 @@
           <a:bodyPr wrap="square" rtlCol="0" anchor="ctr"/>
           <a:lstStyle/>
           <a:p>
-            <a:pPr indent="0" marL="0">
+            <a:pPr marL="0" indent="0">
               <a:buNone/>
             </a:pPr>
             <a:r>
@@ -13132,7 +13126,7 @@
           <a:bodyPr wrap="square" rtlCol="0" anchor="ctr"/>
           <a:lstStyle/>
           <a:p>
-            <a:pPr algn="ctr" indent="0" marL="0">
+            <a:pPr marL="0" indent="0" algn="ctr">
               <a:buNone/>
             </a:pPr>
             <a:r>
@@ -13171,7 +13165,7 @@
           <a:bodyPr wrap="square" rtlCol="0" anchor="ctr"/>
           <a:lstStyle/>
           <a:p>
-            <a:pPr indent="0" marL="0">
+            <a:pPr marL="0" indent="0">
               <a:buNone/>
             </a:pPr>
             <a:r>
@@ -13264,7 +13258,7 @@
           <a:bodyPr wrap="square" rtlCol="0" anchor="ctr"/>
           <a:lstStyle/>
           <a:p>
-            <a:pPr algn="ctr" indent="0" marL="0">
+            <a:pPr marL="0" indent="0" algn="ctr">
               <a:buNone/>
             </a:pPr>
             <a:r>
@@ -13303,7 +13297,7 @@
           <a:bodyPr wrap="square" rtlCol="0" anchor="ctr"/>
           <a:lstStyle/>
           <a:p>
-            <a:pPr indent="0" marL="0">
+            <a:pPr marL="0" indent="0">
               <a:buNone/>
             </a:pPr>
             <a:r>
@@ -13396,7 +13390,7 @@
           <a:bodyPr wrap="square" rtlCol="0" anchor="ctr"/>
           <a:lstStyle/>
           <a:p>
-            <a:pPr algn="ctr" indent="0" marL="0">
+            <a:pPr marL="0" indent="0" algn="ctr">
               <a:buNone/>
             </a:pPr>
             <a:r>
@@ -13435,7 +13429,7 @@
           <a:bodyPr wrap="square" rtlCol="0" anchor="ctr"/>
           <a:lstStyle/>
           <a:p>
-            <a:pPr indent="0" marL="0">
+            <a:pPr marL="0" indent="0">
               <a:buNone/>
             </a:pPr>
             <a:r>
@@ -13539,7 +13533,7 @@
           <a:bodyPr wrap="square" rtlCol="0" anchor="ctr"/>
           <a:lstStyle/>
           <a:p>
-            <a:pPr indent="0" marL="0">
+            <a:pPr marL="0" indent="0">
               <a:buNone/>
             </a:pPr>
             <a:r>
@@ -13578,7 +13572,7 @@
           <a:bodyPr wrap="square" rtlCol="0" anchor="ctr"/>
           <a:lstStyle/>
           <a:p>
-            <a:pPr indent="0" marL="0">
+            <a:pPr marL="0" indent="0">
               <a:buNone/>
             </a:pPr>
             <a:r>
@@ -13595,7 +13589,7 @@
             <a:endParaRPr lang="en-US" sz="1300" dirty="0"/>
           </a:p>
           <a:p>
-            <a:pPr indent="0" marL="0">
+            <a:pPr marL="0" indent="0">
               <a:buNone/>
             </a:pPr>
             <a:r>
@@ -13661,7 +13655,7 @@
           <a:bodyPr wrap="square" rtlCol="0" anchor="ctr"/>
           <a:lstStyle/>
           <a:p>
-            <a:pPr algn="ctr" indent="0" marL="0">
+            <a:pPr marL="0" indent="0" algn="ctr">
               <a:buNone/>
             </a:pPr>
             <a:r>
@@ -13697,7 +13691,7 @@
           <a:bodyPr wrap="square" rtlCol="0" anchor="ctr"/>
           <a:lstStyle/>
           <a:p>
-            <a:pPr algn="ctr" indent="0" marL="0">
+            <a:pPr marL="0" indent="0" algn="ctr">
               <a:buNone/>
             </a:pPr>
             <a:r>
@@ -13736,7 +13730,7 @@
           <a:bodyPr wrap="square" rtlCol="0" anchor="ctr"/>
           <a:lstStyle/>
           <a:p>
-            <a:pPr algn="ctr" indent="0" marL="0">
+            <a:pPr marL="0" indent="0" algn="ctr">
               <a:buNone/>
             </a:pPr>
             <a:r>
@@ -13802,7 +13796,7 @@
           <a:bodyPr wrap="square" rtlCol="0" anchor="ctr"/>
           <a:lstStyle/>
           <a:p>
-            <a:pPr algn="ctr" indent="0" marL="0">
+            <a:pPr marL="0" indent="0" algn="ctr">
               <a:buNone/>
             </a:pPr>
             <a:r>
@@ -13838,7 +13832,7 @@
           <a:bodyPr wrap="square" rtlCol="0" anchor="ctr"/>
           <a:lstStyle/>
           <a:p>
-            <a:pPr algn="ctr" indent="0" marL="0">
+            <a:pPr marL="0" indent="0" algn="ctr">
               <a:buNone/>
             </a:pPr>
             <a:r>
@@ -13877,7 +13871,7 @@
           <a:bodyPr wrap="square" rtlCol="0" anchor="ctr"/>
           <a:lstStyle/>
           <a:p>
-            <a:pPr algn="ctr" indent="0" marL="0">
+            <a:pPr marL="0" indent="0" algn="ctr">
               <a:buNone/>
             </a:pPr>
             <a:r>
@@ -13943,7 +13937,7 @@
           <a:bodyPr wrap="square" rtlCol="0" anchor="ctr"/>
           <a:lstStyle/>
           <a:p>
-            <a:pPr algn="ctr" indent="0" marL="0">
+            <a:pPr marL="0" indent="0" algn="ctr">
               <a:buNone/>
             </a:pPr>
             <a:r>
@@ -13979,7 +13973,7 @@
           <a:bodyPr wrap="square" rtlCol="0" anchor="ctr"/>
           <a:lstStyle/>
           <a:p>
-            <a:pPr algn="ctr" indent="0" marL="0">
+            <a:pPr marL="0" indent="0" algn="ctr">
               <a:buNone/>
             </a:pPr>
             <a:r>
@@ -14018,7 +14012,7 @@
           <a:bodyPr wrap="square" rtlCol="0" anchor="ctr"/>
           <a:lstStyle/>
           <a:p>
-            <a:pPr algn="ctr" indent="0" marL="0">
+            <a:pPr marL="0" indent="0" algn="ctr">
               <a:buNone/>
             </a:pPr>
             <a:r>
@@ -14057,7 +14051,7 @@
           <a:bodyPr wrap="square" rtlCol="0" anchor="ctr"/>
           <a:lstStyle/>
           <a:p>
-            <a:pPr indent="0" marL="0">
+            <a:pPr marL="0" indent="0">
               <a:buNone/>
             </a:pPr>
             <a:r>
@@ -14118,7 +14112,7 @@
           <a:bodyPr wrap="square" rtlCol="0" anchor="ctr"/>
           <a:lstStyle/>
           <a:p>
-            <a:pPr algn="ctr" indent="0" marL="0">
+            <a:pPr marL="0" indent="0" algn="ctr">
               <a:buNone/>
             </a:pPr>
             <a:r>
@@ -14157,7 +14151,7 @@
           <a:bodyPr wrap="square" rtlCol="0" anchor="ctr"/>
           <a:lstStyle/>
           <a:p>
-            <a:pPr algn="ctr" indent="0" marL="0">
+            <a:pPr marL="0" indent="0" algn="ctr">
               <a:buNone/>
             </a:pPr>
             <a:r>
@@ -14218,7 +14212,7 @@
           <a:bodyPr wrap="square" rtlCol="0" anchor="ctr"/>
           <a:lstStyle/>
           <a:p>
-            <a:pPr algn="ctr" indent="0" marL="0">
+            <a:pPr marL="0" indent="0" algn="ctr">
               <a:buNone/>
             </a:pPr>
             <a:r>
@@ -14257,7 +14251,7 @@
           <a:bodyPr wrap="square" rtlCol="0" anchor="ctr"/>
           <a:lstStyle/>
           <a:p>
-            <a:pPr algn="ctr" indent="0" marL="0">
+            <a:pPr marL="0" indent="0" algn="ctr">
               <a:buNone/>
             </a:pPr>
             <a:r>
@@ -14318,7 +14312,7 @@
           <a:bodyPr wrap="square" rtlCol="0" anchor="ctr"/>
           <a:lstStyle/>
           <a:p>
-            <a:pPr algn="ctr" indent="0" marL="0">
+            <a:pPr marL="0" indent="0" algn="ctr">
               <a:buNone/>
             </a:pPr>
             <a:r>
@@ -14357,7 +14351,7 @@
           <a:bodyPr wrap="square" rtlCol="0" anchor="ctr"/>
           <a:lstStyle/>
           <a:p>
-            <a:pPr algn="ctr" indent="0" marL="0">
+            <a:pPr marL="0" indent="0" algn="ctr">
               <a:buNone/>
             </a:pPr>
             <a:r>
@@ -14461,7 +14455,7 @@
           <a:bodyPr wrap="square" rtlCol="0" anchor="ctr"/>
           <a:lstStyle/>
           <a:p>
-            <a:pPr indent="0" marL="0">
+            <a:pPr marL="0" indent="0">
               <a:buNone/>
             </a:pPr>
             <a:r>
@@ -14549,7 +14543,7 @@
           <a:bodyPr wrap="square" rtlCol="0" anchor="ctr"/>
           <a:lstStyle/>
           <a:p>
-            <a:pPr algn="ctr" indent="0" marL="0">
+            <a:pPr marL="0" indent="0" algn="ctr">
               <a:buNone/>
             </a:pPr>
             <a:r>
@@ -14588,7 +14582,7 @@
           <a:bodyPr wrap="square" rtlCol="0" anchor="ctr"/>
           <a:lstStyle/>
           <a:p>
-            <a:pPr algn="ctr" indent="0" marL="0">
+            <a:pPr marL="0" indent="0" algn="ctr">
               <a:buNone/>
             </a:pPr>
             <a:r>
@@ -14654,7 +14648,7 @@
           <a:bodyPr wrap="square" rtlCol="0" anchor="ctr"/>
           <a:lstStyle/>
           <a:p>
-            <a:pPr algn="ctr" indent="0" marL="0">
+            <a:pPr marL="0" indent="0" algn="ctr">
               <a:buNone/>
             </a:pPr>
             <a:r>
@@ -14720,7 +14714,7 @@
           <a:bodyPr wrap="square" rtlCol="0" anchor="ctr"/>
           <a:lstStyle/>
           <a:p>
-            <a:pPr algn="ctr" indent="0" marL="0">
+            <a:pPr marL="0" indent="0" algn="ctr">
               <a:buNone/>
             </a:pPr>
             <a:r>
@@ -14786,7 +14780,7 @@
           <a:bodyPr wrap="square" rtlCol="0" anchor="ctr"/>
           <a:lstStyle/>
           <a:p>
-            <a:pPr algn="ctr" indent="0" marL="0">
+            <a:pPr marL="0" indent="0" algn="ctr">
               <a:buNone/>
             </a:pPr>
             <a:r>
@@ -14852,7 +14846,7 @@
           <a:bodyPr wrap="square" rtlCol="0" anchor="ctr"/>
           <a:lstStyle/>
           <a:p>
-            <a:pPr algn="ctr" indent="0" marL="0">
+            <a:pPr marL="0" indent="0" algn="ctr">
               <a:buNone/>
             </a:pPr>
             <a:r>
@@ -14918,7 +14912,7 @@
           <a:bodyPr wrap="square" rtlCol="0" anchor="ctr"/>
           <a:lstStyle/>
           <a:p>
-            <a:pPr algn="ctr" indent="0" marL="0">
+            <a:pPr marL="0" indent="0" algn="ctr">
               <a:buNone/>
             </a:pPr>
             <a:r>
@@ -15006,7 +15000,7 @@
           <a:bodyPr wrap="square" rtlCol="0" anchor="ctr"/>
           <a:lstStyle/>
           <a:p>
-            <a:pPr algn="ctr" indent="0" marL="0">
+            <a:pPr marL="0" indent="0" algn="ctr">
               <a:buNone/>
             </a:pPr>
             <a:r>
@@ -15045,7 +15039,7 @@
           <a:bodyPr wrap="square" rtlCol="0" anchor="ctr"/>
           <a:lstStyle/>
           <a:p>
-            <a:pPr algn="ctr" indent="0" marL="0">
+            <a:pPr marL="0" indent="0" algn="ctr">
               <a:buNone/>
             </a:pPr>
             <a:r>
@@ -15111,7 +15105,7 @@
           <a:bodyPr wrap="square" rtlCol="0" anchor="ctr"/>
           <a:lstStyle/>
           <a:p>
-            <a:pPr algn="ctr" indent="0" marL="0">
+            <a:pPr marL="0" indent="0" algn="ctr">
               <a:buNone/>
             </a:pPr>
             <a:r>
@@ -15177,7 +15171,7 @@
           <a:bodyPr wrap="square" rtlCol="0" anchor="ctr"/>
           <a:lstStyle/>
           <a:p>
-            <a:pPr algn="ctr" indent="0" marL="0">
+            <a:pPr marL="0" indent="0" algn="ctr">
               <a:buNone/>
             </a:pPr>
             <a:r>
@@ -15243,7 +15237,7 @@
           <a:bodyPr wrap="square" rtlCol="0" anchor="ctr"/>
           <a:lstStyle/>
           <a:p>
-            <a:pPr algn="ctr" indent="0" marL="0">
+            <a:pPr marL="0" indent="0" algn="ctr">
               <a:buNone/>
             </a:pPr>
             <a:r>
@@ -15309,7 +15303,7 @@
           <a:bodyPr wrap="square" rtlCol="0" anchor="ctr"/>
           <a:lstStyle/>
           <a:p>
-            <a:pPr algn="ctr" indent="0" marL="0">
+            <a:pPr marL="0" indent="0" algn="ctr">
               <a:buNone/>
             </a:pPr>
             <a:r>
@@ -15375,7 +15369,7 @@
           <a:bodyPr wrap="square" rtlCol="0" anchor="ctr"/>
           <a:lstStyle/>
           <a:p>
-            <a:pPr algn="ctr" indent="0" marL="0">
+            <a:pPr marL="0" indent="0" algn="ctr">
               <a:buNone/>
             </a:pPr>
             <a:r>
@@ -15463,7 +15457,7 @@
           <a:bodyPr wrap="square" rtlCol="0" anchor="ctr"/>
           <a:lstStyle/>
           <a:p>
-            <a:pPr algn="ctr" indent="0" marL="0">
+            <a:pPr marL="0" indent="0" algn="ctr">
               <a:buNone/>
             </a:pPr>
             <a:r>
@@ -15529,7 +15523,7 @@
           <a:bodyPr wrap="square" rtlCol="0" anchor="ctr"/>
           <a:lstStyle/>
           <a:p>
-            <a:pPr algn="ctr" indent="0" marL="0">
+            <a:pPr marL="0" indent="0" algn="ctr">
               <a:buNone/>
             </a:pPr>
             <a:r>
@@ -15595,7 +15589,7 @@
           <a:bodyPr wrap="square" rtlCol="0" anchor="ctr"/>
           <a:lstStyle/>
           <a:p>
-            <a:pPr algn="ctr" indent="0" marL="0">
+            <a:pPr marL="0" indent="0" algn="ctr">
               <a:buNone/>
             </a:pPr>
             <a:r>
@@ -15661,7 +15655,7 @@
           <a:bodyPr wrap="square" rtlCol="0" anchor="ctr"/>
           <a:lstStyle/>
           <a:p>
-            <a:pPr algn="ctr" indent="0" marL="0">
+            <a:pPr marL="0" indent="0" algn="ctr">
               <a:buNone/>
             </a:pPr>
             <a:r>
@@ -15727,7 +15721,7 @@
           <a:bodyPr wrap="square" rtlCol="0" anchor="ctr"/>
           <a:lstStyle/>
           <a:p>
-            <a:pPr algn="ctr" indent="0" marL="0">
+            <a:pPr marL="0" indent="0" algn="ctr">
               <a:buNone/>
             </a:pPr>
             <a:r>
@@ -15786,7 +15780,7 @@
           <a:bodyPr wrap="square" rtlCol="0" anchor="ctr"/>
           <a:lstStyle/>
           <a:p>
-            <a:pPr algn="ctr" indent="0" marL="0">
+            <a:pPr marL="0" indent="0" algn="ctr">
               <a:buNone/>
             </a:pPr>
             <a:r>
@@ -15822,7 +15816,7 @@
           <a:bodyPr wrap="square" rtlCol="0" anchor="ctr"/>
           <a:lstStyle/>
           <a:p>
-            <a:pPr algn="ctr" indent="0" marL="0">
+            <a:pPr marL="0" indent="0" algn="ctr">
               <a:buNone/>
             </a:pPr>
             <a:r>
@@ -15881,7 +15875,7 @@
           <a:bodyPr wrap="square" rtlCol="0" anchor="ctr"/>
           <a:lstStyle/>
           <a:p>
-            <a:pPr algn="ctr" indent="0" marL="0">
+            <a:pPr marL="0" indent="0" algn="ctr">
               <a:buNone/>
             </a:pPr>
             <a:r>
@@ -15917,7 +15911,7 @@
           <a:bodyPr wrap="square" rtlCol="0" anchor="ctr"/>
           <a:lstStyle/>
           <a:p>
-            <a:pPr algn="ctr" indent="0" marL="0">
+            <a:pPr marL="0" indent="0" algn="ctr">
               <a:buNone/>
             </a:pPr>
             <a:r>
@@ -16021,7 +16015,7 @@
           <a:bodyPr wrap="square" rtlCol="0" anchor="ctr"/>
           <a:lstStyle/>
           <a:p>
-            <a:pPr indent="0" marL="0">
+            <a:pPr marL="0" indent="0">
               <a:buNone/>
             </a:pPr>
             <a:r>
@@ -16060,7 +16054,7 @@
           <a:bodyPr wrap="square" rtlCol="0" anchor="ctr"/>
           <a:lstStyle/>
           <a:p>
-            <a:pPr indent="0" marL="0">
+            <a:pPr marL="0" indent="0">
               <a:buNone/>
             </a:pPr>
             <a:r>
@@ -16119,7 +16113,7 @@
           <a:bodyPr wrap="square" rtlCol="0" anchor="ctr"/>
           <a:lstStyle/>
           <a:p>
-            <a:pPr algn="ctr" indent="0" marL="0">
+            <a:pPr marL="0" indent="0" algn="ctr">
               <a:buNone/>
             </a:pPr>
             <a:r>
@@ -16158,7 +16152,7 @@
           <a:bodyPr wrap="square" rtlCol="0" anchor="ctr"/>
           <a:lstStyle/>
           <a:p>
-            <a:pPr algn="ctr" indent="0" marL="0">
+            <a:pPr marL="0" indent="0" algn="ctr">
               <a:buNone/>
             </a:pPr>
             <a:r>
@@ -16175,7 +16169,7 @@
             <a:endParaRPr lang="en-US" sz="1000" dirty="0"/>
           </a:p>
           <a:p>
-            <a:pPr algn="ctr" indent="0" marL="0">
+            <a:pPr marL="0" indent="0" algn="ctr">
               <a:buNone/>
             </a:pPr>
             <a:r>
@@ -16214,7 +16208,7 @@
           <a:bodyPr wrap="square" rtlCol="0" anchor="ctr"/>
           <a:lstStyle/>
           <a:p>
-            <a:pPr algn="ctr" indent="0" marL="0">
+            <a:pPr marL="0" indent="0" algn="ctr">
               <a:buNone/>
             </a:pPr>
             <a:r>
@@ -16270,7 +16264,7 @@
           <a:bodyPr wrap="square" rtlCol="0" anchor="ctr"/>
           <a:lstStyle/>
           <a:p>
-            <a:pPr algn="ctr" indent="0" marL="0">
+            <a:pPr marL="0" indent="0" algn="ctr">
               <a:buNone/>
             </a:pPr>
             <a:r>
@@ -16309,7 +16303,7 @@
           <a:bodyPr wrap="square" rtlCol="0" anchor="ctr"/>
           <a:lstStyle/>
           <a:p>
-            <a:pPr algn="ctr" indent="0" marL="0">
+            <a:pPr marL="0" indent="0" algn="ctr">
               <a:buNone/>
             </a:pPr>
             <a:r>
@@ -16326,7 +16320,7 @@
             <a:endParaRPr lang="en-US" sz="1000" dirty="0"/>
           </a:p>
           <a:p>
-            <a:pPr algn="ctr" indent="0" marL="0">
+            <a:pPr marL="0" indent="0" algn="ctr">
               <a:buNone/>
             </a:pPr>
             <a:r>
@@ -16365,7 +16359,7 @@
           <a:bodyPr wrap="square" rtlCol="0" anchor="ctr"/>
           <a:lstStyle/>
           <a:p>
-            <a:pPr algn="ctr" indent="0" marL="0">
+            <a:pPr marL="0" indent="0" algn="ctr">
               <a:buNone/>
             </a:pPr>
             <a:r>
@@ -16421,7 +16415,7 @@
           <a:bodyPr wrap="square" rtlCol="0" anchor="ctr"/>
           <a:lstStyle/>
           <a:p>
-            <a:pPr algn="ctr" indent="0" marL="0">
+            <a:pPr marL="0" indent="0" algn="ctr">
               <a:buNone/>
             </a:pPr>
             <a:r>
@@ -16460,7 +16454,7 @@
           <a:bodyPr wrap="square" rtlCol="0" anchor="ctr"/>
           <a:lstStyle/>
           <a:p>
-            <a:pPr algn="ctr" indent="0" marL="0">
+            <a:pPr marL="0" indent="0" algn="ctr">
               <a:buNone/>
             </a:pPr>
             <a:r>
@@ -16477,7 +16471,7 @@
             <a:endParaRPr lang="en-US" sz="1000" dirty="0"/>
           </a:p>
           <a:p>
-            <a:pPr algn="ctr" indent="0" marL="0">
+            <a:pPr marL="0" indent="0" algn="ctr">
               <a:buNone/>
             </a:pPr>
             <a:r>
@@ -16516,7 +16510,7 @@
           <a:bodyPr wrap="square" rtlCol="0" anchor="ctr"/>
           <a:lstStyle/>
           <a:p>
-            <a:pPr algn="ctr" indent="0" marL="0">
+            <a:pPr marL="0" indent="0" algn="ctr">
               <a:buNone/>
             </a:pPr>
             <a:r>
@@ -16572,7 +16566,7 @@
           <a:bodyPr wrap="square" rtlCol="0" anchor="ctr"/>
           <a:lstStyle/>
           <a:p>
-            <a:pPr algn="ctr" indent="0" marL="0">
+            <a:pPr marL="0" indent="0" algn="ctr">
               <a:buNone/>
             </a:pPr>
             <a:r>
@@ -16611,7 +16605,7 @@
           <a:bodyPr wrap="square" rtlCol="0" anchor="ctr"/>
           <a:lstStyle/>
           <a:p>
-            <a:pPr algn="ctr" indent="0" marL="0">
+            <a:pPr marL="0" indent="0" algn="ctr">
               <a:buNone/>
             </a:pPr>
             <a:r>
@@ -16628,7 +16622,7 @@
             <a:endParaRPr lang="en-US" sz="1000" dirty="0"/>
           </a:p>
           <a:p>
-            <a:pPr algn="ctr" indent="0" marL="0">
+            <a:pPr marL="0" indent="0" algn="ctr">
               <a:buNone/>
             </a:pPr>
             <a:r>
@@ -16667,7 +16661,7 @@
           <a:bodyPr wrap="square" rtlCol="0" anchor="ctr"/>
           <a:lstStyle/>
           <a:p>
-            <a:pPr algn="ctr" indent="0" marL="0">
+            <a:pPr marL="0" indent="0" algn="ctr">
               <a:buNone/>
             </a:pPr>
             <a:r>
@@ -16723,7 +16717,7 @@
           <a:bodyPr wrap="square" rtlCol="0" anchor="ctr"/>
           <a:lstStyle/>
           <a:p>
-            <a:pPr algn="ctr" indent="0" marL="0">
+            <a:pPr marL="0" indent="0" algn="ctr">
               <a:buNone/>
             </a:pPr>
             <a:r>
@@ -16762,7 +16756,7 @@
           <a:bodyPr wrap="square" rtlCol="0" anchor="ctr"/>
           <a:lstStyle/>
           <a:p>
-            <a:pPr algn="ctr" indent="0" marL="0">
+            <a:pPr marL="0" indent="0" algn="ctr">
               <a:buNone/>
             </a:pPr>
             <a:r>
@@ -16779,7 +16773,7 @@
             <a:endParaRPr lang="en-US" sz="1000" dirty="0"/>
           </a:p>
           <a:p>
-            <a:pPr algn="ctr" indent="0" marL="0">
+            <a:pPr marL="0" indent="0" algn="ctr">
               <a:buNone/>
             </a:pPr>
             <a:r>
@@ -16818,7 +16812,7 @@
           <a:bodyPr wrap="square" rtlCol="0" anchor="ctr"/>
           <a:lstStyle/>
           <a:p>
-            <a:pPr indent="0" marL="0">
+            <a:pPr marL="0" indent="0">
               <a:buNone/>
             </a:pPr>
             <a:r>
@@ -16838,7 +16832,7 @@
       </p:sp>
       <p:graphicFrame>
         <p:nvGraphicFramePr>
-          <p:cNvPr id="6" name="Table 0"/>
+          <p:cNvPr id="26" name="Table 0"/>
           <p:cNvGraphicFramePr>
             <a:graphicFrameLocks noGrp="1"/>
           </p:cNvGraphicFramePr>
@@ -16852,17 +16846,41 @@
         </p:nvGraphicFramePr>
         <p:xfrm>
           <a:off x="365760" y="2880360"/>
-          <a:ext cx="11155680" cy="914400"/>
+          <a:ext cx="11155680" cy="1865376"/>
         </p:xfrm>
         <a:graphic>
           <a:graphicData uri="http://schemas.openxmlformats.org/drawingml/2006/table">
             <a:tbl>
               <a:tblPr/>
               <a:tblGrid>
-                <a:gridCol w="4114800"/>
-                <a:gridCol w="2194560"/>
-                <a:gridCol w="2194560"/>
-                <a:gridCol w="2651760"/>
+                <a:gridCol w="4114800">
+                  <a:extLst>
+                    <a:ext uri="{9D8B030D-6E8A-4147-A177-3AD203B41FA5}">
+                      <a16:colId xmlns:a16="http://schemas.microsoft.com/office/drawing/2014/main" val="20000"/>
+                    </a:ext>
+                  </a:extLst>
+                </a:gridCol>
+                <a:gridCol w="2194560">
+                  <a:extLst>
+                    <a:ext uri="{9D8B030D-6E8A-4147-A177-3AD203B41FA5}">
+                      <a16:colId xmlns:a16="http://schemas.microsoft.com/office/drawing/2014/main" val="20001"/>
+                    </a:ext>
+                  </a:extLst>
+                </a:gridCol>
+                <a:gridCol w="2194560">
+                  <a:extLst>
+                    <a:ext uri="{9D8B030D-6E8A-4147-A177-3AD203B41FA5}">
+                      <a16:colId xmlns:a16="http://schemas.microsoft.com/office/drawing/2014/main" val="20002"/>
+                    </a:ext>
+                  </a:extLst>
+                </a:gridCol>
+                <a:gridCol w="2651760">
+                  <a:extLst>
+                    <a:ext uri="{9D8B030D-6E8A-4147-A177-3AD203B41FA5}">
+                      <a16:colId xmlns:a16="http://schemas.microsoft.com/office/drawing/2014/main" val="20003"/>
+                    </a:ext>
+                  </a:extLst>
+                </a:gridCol>
               </a:tblGrid>
               <a:tr h="310896">
                 <a:tc>
@@ -16870,7 +16888,7 @@
                     <a:bodyPr/>
                     <a:lstStyle/>
                     <a:p>
-                      <a:pPr algn="ctr" indent="0" marL="0">
+                      <a:pPr marL="0" indent="0" algn="ctr">
                         <a:buNone/>
                       </a:pPr>
                       <a:r>
@@ -16891,7 +16909,7 @@
                       </a:endParaRPr>
                     </a:p>
                   </a:txBody>
-                  <a:tcPr marL="91440" marR="91440" marT="45720" marB="45720">
+                  <a:tcPr>
                     <a:lnL w="6350" cap="flat" cmpd="sng" algn="ctr">
                       <a:solidFill>
                         <a:srgbClr val="CCCCCC"/>
@@ -16938,7 +16956,7 @@
                     <a:bodyPr/>
                     <a:lstStyle/>
                     <a:p>
-                      <a:pPr algn="ctr" indent="0" marL="0">
+                      <a:pPr marL="0" indent="0" algn="ctr">
                         <a:buNone/>
                       </a:pPr>
                       <a:r>
@@ -16959,7 +16977,7 @@
                       </a:endParaRPr>
                     </a:p>
                   </a:txBody>
-                  <a:tcPr marL="91440" marR="91440" marT="45720" marB="45720">
+                  <a:tcPr>
                     <a:lnL w="6350" cap="flat" cmpd="sng" algn="ctr">
                       <a:solidFill>
                         <a:srgbClr val="CCCCCC"/>
@@ -17006,7 +17024,7 @@
                     <a:bodyPr/>
                     <a:lstStyle/>
                     <a:p>
-                      <a:pPr algn="ctr" indent="0" marL="0">
+                      <a:pPr marL="0" indent="0" algn="ctr">
                         <a:buNone/>
                       </a:pPr>
                       <a:r>
@@ -17027,7 +17045,7 @@
                       </a:endParaRPr>
                     </a:p>
                   </a:txBody>
-                  <a:tcPr marL="91440" marR="91440" marT="45720" marB="45720">
+                  <a:tcPr>
                     <a:lnL w="6350" cap="flat" cmpd="sng" algn="ctr">
                       <a:solidFill>
                         <a:srgbClr val="CCCCCC"/>
@@ -17074,7 +17092,7 @@
                     <a:bodyPr/>
                     <a:lstStyle/>
                     <a:p>
-                      <a:pPr algn="ctr" indent="0" marL="0">
+                      <a:pPr marL="0" indent="0" algn="ctr">
                         <a:buNone/>
                       </a:pPr>
                       <a:r>
@@ -17095,7 +17113,7 @@
                       </a:endParaRPr>
                     </a:p>
                   </a:txBody>
-                  <a:tcPr marL="91440" marR="91440" marT="45720" marB="45720">
+                  <a:tcPr>
                     <a:lnL w="6350" cap="flat" cmpd="sng" algn="ctr">
                       <a:solidFill>
                         <a:srgbClr val="CCCCCC"/>
@@ -17137,6 +17155,11 @@
                     </a:solidFill>
                   </a:tcPr>
                 </a:tc>
+                <a:extLst>
+                  <a:ext uri="{0D108BD9-81ED-4DB2-BD59-A6C34878D82A}">
+                    <a16:rowId xmlns:a16="http://schemas.microsoft.com/office/drawing/2014/main" val="10000"/>
+                  </a:ext>
+                </a:extLst>
               </a:tr>
               <a:tr h="310896">
                 <a:tc>
@@ -17144,7 +17167,7 @@
                     <a:bodyPr/>
                     <a:lstStyle/>
                     <a:p>
-                      <a:pPr indent="0" marL="0">
+                      <a:pPr marL="0" indent="0">
                         <a:buNone/>
                       </a:pPr>
                       <a:r>
@@ -17165,7 +17188,7 @@
                       </a:endParaRPr>
                     </a:p>
                   </a:txBody>
-                  <a:tcPr marL="91440" marR="91440" marT="45720" marB="45720">
+                  <a:tcPr>
                     <a:lnL w="6350" cap="flat" cmpd="sng" algn="ctr">
                       <a:solidFill>
                         <a:srgbClr val="CCCCCC"/>
@@ -17212,7 +17235,7 @@
                     <a:bodyPr/>
                     <a:lstStyle/>
                     <a:p>
-                      <a:pPr indent="0" marL="0">
+                      <a:pPr marL="0" indent="0">
                         <a:buNone/>
                       </a:pPr>
                       <a:r>
@@ -17233,7 +17256,7 @@
                       </a:endParaRPr>
                     </a:p>
                   </a:txBody>
-                  <a:tcPr marL="91440" marR="91440" marT="45720" marB="45720">
+                  <a:tcPr>
                     <a:lnL w="6350" cap="flat" cmpd="sng" algn="ctr">
                       <a:solidFill>
                         <a:srgbClr val="CCCCCC"/>
@@ -17280,7 +17303,7 @@
                     <a:bodyPr/>
                     <a:lstStyle/>
                     <a:p>
-                      <a:pPr indent="0" marL="0">
+                      <a:pPr marL="0" indent="0">
                         <a:buNone/>
                       </a:pPr>
                       <a:r>
@@ -17301,7 +17324,7 @@
                       </a:endParaRPr>
                     </a:p>
                   </a:txBody>
-                  <a:tcPr marL="91440" marR="91440" marT="45720" marB="45720">
+                  <a:tcPr>
                     <a:lnL w="6350" cap="flat" cmpd="sng" algn="ctr">
                       <a:solidFill>
                         <a:srgbClr val="CCCCCC"/>
@@ -17348,7 +17371,7 @@
                     <a:bodyPr/>
                     <a:lstStyle/>
                     <a:p>
-                      <a:pPr indent="0" marL="0">
+                      <a:pPr marL="0" indent="0">
                         <a:buNone/>
                       </a:pPr>
                       <a:r>
@@ -17369,7 +17392,7 @@
                       </a:endParaRPr>
                     </a:p>
                   </a:txBody>
-                  <a:tcPr marL="91440" marR="91440" marT="45720" marB="45720">
+                  <a:tcPr>
                     <a:lnL w="6350" cap="flat" cmpd="sng" algn="ctr">
                       <a:solidFill>
                         <a:srgbClr val="CCCCCC"/>
@@ -17411,6 +17434,11 @@
                     </a:solidFill>
                   </a:tcPr>
                 </a:tc>
+                <a:extLst>
+                  <a:ext uri="{0D108BD9-81ED-4DB2-BD59-A6C34878D82A}">
+                    <a16:rowId xmlns:a16="http://schemas.microsoft.com/office/drawing/2014/main" val="10001"/>
+                  </a:ext>
+                </a:extLst>
               </a:tr>
               <a:tr h="310896">
                 <a:tc>
@@ -17418,7 +17446,7 @@
                     <a:bodyPr/>
                     <a:lstStyle/>
                     <a:p>
-                      <a:pPr indent="0" marL="0">
+                      <a:pPr marL="0" indent="0">
                         <a:buNone/>
                       </a:pPr>
                       <a:r>
@@ -17439,7 +17467,7 @@
                       </a:endParaRPr>
                     </a:p>
                   </a:txBody>
-                  <a:tcPr marL="91440" marR="91440" marT="45720" marB="45720">
+                  <a:tcPr>
                     <a:lnL w="6350" cap="flat" cmpd="sng" algn="ctr">
                       <a:solidFill>
                         <a:srgbClr val="CCCCCC"/>
@@ -17486,7 +17514,7 @@
                     <a:bodyPr/>
                     <a:lstStyle/>
                     <a:p>
-                      <a:pPr indent="0" marL="0">
+                      <a:pPr marL="0" indent="0">
                         <a:buNone/>
                       </a:pPr>
                       <a:r>
@@ -17507,7 +17535,7 @@
                       </a:endParaRPr>
                     </a:p>
                   </a:txBody>
-                  <a:tcPr marL="91440" marR="91440" marT="45720" marB="45720">
+                  <a:tcPr>
                     <a:lnL w="6350" cap="flat" cmpd="sng" algn="ctr">
                       <a:solidFill>
                         <a:srgbClr val="CCCCCC"/>
@@ -17554,7 +17582,7 @@
                     <a:bodyPr/>
                     <a:lstStyle/>
                     <a:p>
-                      <a:pPr indent="0" marL="0">
+                      <a:pPr marL="0" indent="0">
                         <a:buNone/>
                       </a:pPr>
                       <a:r>
@@ -17575,7 +17603,7 @@
                       </a:endParaRPr>
                     </a:p>
                   </a:txBody>
-                  <a:tcPr marL="91440" marR="91440" marT="45720" marB="45720">
+                  <a:tcPr>
                     <a:lnL w="6350" cap="flat" cmpd="sng" algn="ctr">
                       <a:solidFill>
                         <a:srgbClr val="CCCCCC"/>
@@ -17622,7 +17650,7 @@
                     <a:bodyPr/>
                     <a:lstStyle/>
                     <a:p>
-                      <a:pPr indent="0" marL="0">
+                      <a:pPr marL="0" indent="0">
                         <a:buNone/>
                       </a:pPr>
                       <a:r>
@@ -17643,7 +17671,7 @@
                       </a:endParaRPr>
                     </a:p>
                   </a:txBody>
-                  <a:tcPr marL="91440" marR="91440" marT="45720" marB="45720">
+                  <a:tcPr>
                     <a:lnL w="6350" cap="flat" cmpd="sng" algn="ctr">
                       <a:solidFill>
                         <a:srgbClr val="CCCCCC"/>
@@ -17685,6 +17713,11 @@
                     </a:solidFill>
                   </a:tcPr>
                 </a:tc>
+                <a:extLst>
+                  <a:ext uri="{0D108BD9-81ED-4DB2-BD59-A6C34878D82A}">
+                    <a16:rowId xmlns:a16="http://schemas.microsoft.com/office/drawing/2014/main" val="10002"/>
+                  </a:ext>
+                </a:extLst>
               </a:tr>
               <a:tr h="310896">
                 <a:tc>
@@ -17692,7 +17725,7 @@
                     <a:bodyPr/>
                     <a:lstStyle/>
                     <a:p>
-                      <a:pPr indent="0" marL="0">
+                      <a:pPr marL="0" indent="0">
                         <a:buNone/>
                       </a:pPr>
                       <a:r>
@@ -17713,7 +17746,7 @@
                       </a:endParaRPr>
                     </a:p>
                   </a:txBody>
-                  <a:tcPr marL="91440" marR="91440" marT="45720" marB="45720">
+                  <a:tcPr>
                     <a:lnL w="6350" cap="flat" cmpd="sng" algn="ctr">
                       <a:solidFill>
                         <a:srgbClr val="CCCCCC"/>
@@ -17760,7 +17793,7 @@
                     <a:bodyPr/>
                     <a:lstStyle/>
                     <a:p>
-                      <a:pPr indent="0" marL="0">
+                      <a:pPr marL="0" indent="0">
                         <a:buNone/>
                       </a:pPr>
                       <a:r>
@@ -17781,7 +17814,7 @@
                       </a:endParaRPr>
                     </a:p>
                   </a:txBody>
-                  <a:tcPr marL="91440" marR="91440" marT="45720" marB="45720">
+                  <a:tcPr>
                     <a:lnL w="6350" cap="flat" cmpd="sng" algn="ctr">
                       <a:solidFill>
                         <a:srgbClr val="CCCCCC"/>
@@ -17828,7 +17861,7 @@
                     <a:bodyPr/>
                     <a:lstStyle/>
                     <a:p>
-                      <a:pPr indent="0" marL="0">
+                      <a:pPr marL="0" indent="0">
                         <a:buNone/>
                       </a:pPr>
                       <a:r>
@@ -17849,7 +17882,7 @@
                       </a:endParaRPr>
                     </a:p>
                   </a:txBody>
-                  <a:tcPr marL="91440" marR="91440" marT="45720" marB="45720">
+                  <a:tcPr>
                     <a:lnL w="6350" cap="flat" cmpd="sng" algn="ctr">
                       <a:solidFill>
                         <a:srgbClr val="CCCCCC"/>
@@ -17896,7 +17929,7 @@
                     <a:bodyPr/>
                     <a:lstStyle/>
                     <a:p>
-                      <a:pPr indent="0" marL="0">
+                      <a:pPr marL="0" indent="0">
                         <a:buNone/>
                       </a:pPr>
                       <a:r>
@@ -17917,7 +17950,7 @@
                       </a:endParaRPr>
                     </a:p>
                   </a:txBody>
-                  <a:tcPr marL="91440" marR="91440" marT="45720" marB="45720">
+                  <a:tcPr>
                     <a:lnL w="6350" cap="flat" cmpd="sng" algn="ctr">
                       <a:solidFill>
                         <a:srgbClr val="CCCCCC"/>
@@ -17959,6 +17992,11 @@
                     </a:solidFill>
                   </a:tcPr>
                 </a:tc>
+                <a:extLst>
+                  <a:ext uri="{0D108BD9-81ED-4DB2-BD59-A6C34878D82A}">
+                    <a16:rowId xmlns:a16="http://schemas.microsoft.com/office/drawing/2014/main" val="10003"/>
+                  </a:ext>
+                </a:extLst>
               </a:tr>
               <a:tr h="310896">
                 <a:tc>
@@ -17966,7 +18004,7 @@
                     <a:bodyPr/>
                     <a:lstStyle/>
                     <a:p>
-                      <a:pPr indent="0" marL="0">
+                      <a:pPr marL="0" indent="0">
                         <a:buNone/>
                       </a:pPr>
                       <a:r>
@@ -17987,7 +18025,7 @@
                       </a:endParaRPr>
                     </a:p>
                   </a:txBody>
-                  <a:tcPr marL="91440" marR="91440" marT="45720" marB="45720">
+                  <a:tcPr>
                     <a:lnL w="6350" cap="flat" cmpd="sng" algn="ctr">
                       <a:solidFill>
                         <a:srgbClr val="CCCCCC"/>
@@ -18034,7 +18072,7 @@
                     <a:bodyPr/>
                     <a:lstStyle/>
                     <a:p>
-                      <a:pPr indent="0" marL="0">
+                      <a:pPr marL="0" indent="0">
                         <a:buNone/>
                       </a:pPr>
                       <a:r>
@@ -18055,7 +18093,7 @@
                       </a:endParaRPr>
                     </a:p>
                   </a:txBody>
-                  <a:tcPr marL="91440" marR="91440" marT="45720" marB="45720">
+                  <a:tcPr>
                     <a:lnL w="6350" cap="flat" cmpd="sng" algn="ctr">
                       <a:solidFill>
                         <a:srgbClr val="CCCCCC"/>
@@ -18102,7 +18140,7 @@
                     <a:bodyPr/>
                     <a:lstStyle/>
                     <a:p>
-                      <a:pPr indent="0" marL="0">
+                      <a:pPr marL="0" indent="0">
                         <a:buNone/>
                       </a:pPr>
                       <a:r>
@@ -18123,7 +18161,7 @@
                       </a:endParaRPr>
                     </a:p>
                   </a:txBody>
-                  <a:tcPr marL="91440" marR="91440" marT="45720" marB="45720">
+                  <a:tcPr>
                     <a:lnL w="6350" cap="flat" cmpd="sng" algn="ctr">
                       <a:solidFill>
                         <a:srgbClr val="CCCCCC"/>
@@ -18170,7 +18208,7 @@
                     <a:bodyPr/>
                     <a:lstStyle/>
                     <a:p>
-                      <a:pPr indent="0" marL="0">
+                      <a:pPr marL="0" indent="0">
                         <a:buNone/>
                       </a:pPr>
                       <a:r>
@@ -18191,7 +18229,7 @@
                       </a:endParaRPr>
                     </a:p>
                   </a:txBody>
-                  <a:tcPr marL="91440" marR="91440" marT="45720" marB="45720">
+                  <a:tcPr>
                     <a:lnL w="6350" cap="flat" cmpd="sng" algn="ctr">
                       <a:solidFill>
                         <a:srgbClr val="CCCCCC"/>
@@ -18233,6 +18271,11 @@
                     </a:solidFill>
                   </a:tcPr>
                 </a:tc>
+                <a:extLst>
+                  <a:ext uri="{0D108BD9-81ED-4DB2-BD59-A6C34878D82A}">
+                    <a16:rowId xmlns:a16="http://schemas.microsoft.com/office/drawing/2014/main" val="10004"/>
+                  </a:ext>
+                </a:extLst>
               </a:tr>
               <a:tr h="310896">
                 <a:tc>
@@ -18240,7 +18283,7 @@
                     <a:bodyPr/>
                     <a:lstStyle/>
                     <a:p>
-                      <a:pPr indent="0" marL="0">
+                      <a:pPr marL="0" indent="0">
                         <a:buNone/>
                       </a:pPr>
                       <a:r>
@@ -18261,7 +18304,7 @@
                       </a:endParaRPr>
                     </a:p>
                   </a:txBody>
-                  <a:tcPr marL="91440" marR="91440" marT="45720" marB="45720">
+                  <a:tcPr>
                     <a:lnL w="6350" cap="flat" cmpd="sng" algn="ctr">
                       <a:solidFill>
                         <a:srgbClr val="CCCCCC"/>
@@ -18308,7 +18351,7 @@
                     <a:bodyPr/>
                     <a:lstStyle/>
                     <a:p>
-                      <a:pPr indent="0" marL="0">
+                      <a:pPr marL="0" indent="0">
                         <a:buNone/>
                       </a:pPr>
                       <a:r>
@@ -18329,7 +18372,7 @@
                       </a:endParaRPr>
                     </a:p>
                   </a:txBody>
-                  <a:tcPr marL="91440" marR="91440" marT="45720" marB="45720">
+                  <a:tcPr>
                     <a:lnL w="6350" cap="flat" cmpd="sng" algn="ctr">
                       <a:solidFill>
                         <a:srgbClr val="CCCCCC"/>
@@ -18376,7 +18419,7 @@
                     <a:bodyPr/>
                     <a:lstStyle/>
                     <a:p>
-                      <a:pPr indent="0" marL="0">
+                      <a:pPr marL="0" indent="0">
                         <a:buNone/>
                       </a:pPr>
                       <a:r>
@@ -18397,7 +18440,7 @@
                       </a:endParaRPr>
                     </a:p>
                   </a:txBody>
-                  <a:tcPr marL="91440" marR="91440" marT="45720" marB="45720">
+                  <a:tcPr>
                     <a:lnL w="6350" cap="flat" cmpd="sng" algn="ctr">
                       <a:solidFill>
                         <a:srgbClr val="CCCCCC"/>
@@ -18444,7 +18487,7 @@
                     <a:bodyPr/>
                     <a:lstStyle/>
                     <a:p>
-                      <a:pPr indent="0" marL="0">
+                      <a:pPr marL="0" indent="0">
                         <a:buNone/>
                       </a:pPr>
                       <a:r>
@@ -18465,7 +18508,7 @@
                       </a:endParaRPr>
                     </a:p>
                   </a:txBody>
-                  <a:tcPr marL="91440" marR="91440" marT="45720" marB="45720">
+                  <a:tcPr>
                     <a:lnL w="6350" cap="flat" cmpd="sng" algn="ctr">
                       <a:solidFill>
                         <a:srgbClr val="CCCCCC"/>
@@ -18507,6 +18550,11 @@
                     </a:solidFill>
                   </a:tcPr>
                 </a:tc>
+                <a:extLst>
+                  <a:ext uri="{0D108BD9-81ED-4DB2-BD59-A6C34878D82A}">
+                    <a16:rowId xmlns:a16="http://schemas.microsoft.com/office/drawing/2014/main" val="10005"/>
+                  </a:ext>
+                </a:extLst>
               </a:tr>
             </a:tbl>
           </a:graphicData>
@@ -18598,7 +18646,7 @@
           <a:bodyPr wrap="square" rtlCol="0" anchor="ctr"/>
           <a:lstStyle/>
           <a:p>
-            <a:pPr indent="0" marL="0">
+            <a:pPr marL="0" indent="0">
               <a:buNone/>
             </a:pPr>
             <a:r>
@@ -18637,7 +18685,7 @@
           <a:bodyPr wrap="square" rtlCol="0" anchor="ctr"/>
           <a:lstStyle/>
           <a:p>
-            <a:pPr indent="0" marL="0">
+            <a:pPr marL="0" indent="0">
               <a:buNone/>
             </a:pPr>
             <a:r>
@@ -18703,7 +18751,7 @@
           <a:bodyPr wrap="square" rtlCol="0" anchor="ctr"/>
           <a:lstStyle/>
           <a:p>
-            <a:pPr algn="ctr" indent="0" marL="0">
+            <a:pPr marL="0" indent="0" algn="ctr">
               <a:buNone/>
             </a:pPr>
             <a:r>
@@ -18739,7 +18787,7 @@
           <a:bodyPr wrap="square" rtlCol="0" anchor="ctr"/>
           <a:lstStyle/>
           <a:p>
-            <a:pPr algn="ctr" indent="0" marL="0">
+            <a:pPr marL="0" indent="0" algn="ctr">
               <a:buNone/>
             </a:pPr>
             <a:r>
@@ -18778,7 +18826,7 @@
           <a:bodyPr wrap="square" rtlCol="0" anchor="ctr"/>
           <a:lstStyle/>
           <a:p>
-            <a:pPr algn="ctr" indent="0" marL="0">
+            <a:pPr marL="0" indent="0" algn="ctr">
               <a:buNone/>
             </a:pPr>
             <a:r>
@@ -18817,7 +18865,7 @@
           <a:bodyPr wrap="square" rtlCol="0" anchor="ctr"/>
           <a:lstStyle/>
           <a:p>
-            <a:pPr algn="ctr" indent="0" marL="0">
+            <a:pPr marL="0" indent="0" algn="ctr">
               <a:buNone/>
             </a:pPr>
             <a:r>
@@ -18883,7 +18931,7 @@
           <a:bodyPr wrap="square" rtlCol="0" anchor="ctr"/>
           <a:lstStyle/>
           <a:p>
-            <a:pPr algn="ctr" indent="0" marL="0">
+            <a:pPr marL="0" indent="0" algn="ctr">
               <a:buNone/>
             </a:pPr>
             <a:r>
@@ -18919,7 +18967,7 @@
           <a:bodyPr wrap="square" rtlCol="0" anchor="ctr"/>
           <a:lstStyle/>
           <a:p>
-            <a:pPr algn="ctr" indent="0" marL="0">
+            <a:pPr marL="0" indent="0" algn="ctr">
               <a:buNone/>
             </a:pPr>
             <a:r>
@@ -18958,7 +19006,7 @@
           <a:bodyPr wrap="square" rtlCol="0" anchor="ctr"/>
           <a:lstStyle/>
           <a:p>
-            <a:pPr algn="ctr" indent="0" marL="0">
+            <a:pPr marL="0" indent="0" algn="ctr">
               <a:buNone/>
             </a:pPr>
             <a:r>
@@ -18997,7 +19045,7 @@
           <a:bodyPr wrap="square" rtlCol="0" anchor="ctr"/>
           <a:lstStyle/>
           <a:p>
-            <a:pPr algn="ctr" indent="0" marL="0">
+            <a:pPr marL="0" indent="0" algn="ctr">
               <a:buNone/>
             </a:pPr>
             <a:r>
@@ -19063,7 +19111,7 @@
           <a:bodyPr wrap="square" rtlCol="0" anchor="ctr"/>
           <a:lstStyle/>
           <a:p>
-            <a:pPr algn="ctr" indent="0" marL="0">
+            <a:pPr marL="0" indent="0" algn="ctr">
               <a:buNone/>
             </a:pPr>
             <a:r>
@@ -19099,7 +19147,7 @@
           <a:bodyPr wrap="square" rtlCol="0" anchor="ctr"/>
           <a:lstStyle/>
           <a:p>
-            <a:pPr algn="ctr" indent="0" marL="0">
+            <a:pPr marL="0" indent="0" algn="ctr">
               <a:buNone/>
             </a:pPr>
             <a:r>
@@ -19138,7 +19186,7 @@
           <a:bodyPr wrap="square" rtlCol="0" anchor="ctr"/>
           <a:lstStyle/>
           <a:p>
-            <a:pPr algn="ctr" indent="0" marL="0">
+            <a:pPr marL="0" indent="0" algn="ctr">
               <a:buNone/>
             </a:pPr>
             <a:r>
@@ -19177,7 +19225,7 @@
           <a:bodyPr wrap="square" rtlCol="0" anchor="ctr"/>
           <a:lstStyle/>
           <a:p>
-            <a:pPr algn="ctr" indent="0" marL="0">
+            <a:pPr marL="0" indent="0" algn="ctr">
               <a:buNone/>
             </a:pPr>
             <a:r>
@@ -19243,7 +19291,7 @@
           <a:bodyPr wrap="square" rtlCol="0" anchor="ctr"/>
           <a:lstStyle/>
           <a:p>
-            <a:pPr algn="ctr" indent="0" marL="0">
+            <a:pPr marL="0" indent="0" algn="ctr">
               <a:buNone/>
             </a:pPr>
             <a:r>
@@ -19279,7 +19327,7 @@
           <a:bodyPr wrap="square" rtlCol="0" anchor="ctr"/>
           <a:lstStyle/>
           <a:p>
-            <a:pPr algn="ctr" indent="0" marL="0">
+            <a:pPr marL="0" indent="0" algn="ctr">
               <a:buNone/>
             </a:pPr>
             <a:r>
@@ -19318,7 +19366,7 @@
           <a:bodyPr wrap="square" rtlCol="0" anchor="ctr"/>
           <a:lstStyle/>
           <a:p>
-            <a:pPr algn="ctr" indent="0" marL="0">
+            <a:pPr marL="0" indent="0" algn="ctr">
               <a:buNone/>
             </a:pPr>
             <a:r>
@@ -19357,7 +19405,7 @@
           <a:bodyPr wrap="square" rtlCol="0" anchor="ctr"/>
           <a:lstStyle/>
           <a:p>
-            <a:pPr algn="ctr" indent="0" marL="0">
+            <a:pPr marL="0" indent="0" algn="ctr">
               <a:buNone/>
             </a:pPr>
             <a:r>
@@ -19396,7 +19444,7 @@
           <a:bodyPr wrap="square" rtlCol="0" anchor="ctr"/>
           <a:lstStyle/>
           <a:p>
-            <a:pPr indent="0" marL="0">
+            <a:pPr marL="0" indent="0">
               <a:buNone/>
             </a:pPr>
             <a:r>
@@ -19435,7 +19483,7 @@
           <a:bodyPr wrap="square" rtlCol="0" anchor="ctr"/>
           <a:lstStyle/>
           <a:p>
-            <a:pPr indent="0" marL="0">
+            <a:pPr marL="0" indent="0">
               <a:buNone/>
             </a:pPr>
             <a:r>
@@ -19474,7 +19522,7 @@
           <a:bodyPr wrap="square" rtlCol="0" anchor="ctr"/>
           <a:lstStyle/>
           <a:p>
-            <a:pPr indent="0" marL="0">
+            <a:pPr marL="0" indent="0">
               <a:buNone/>
             </a:pPr>
             <a:r>
@@ -19513,7 +19561,7 @@
           <a:bodyPr wrap="square" rtlCol="0" anchor="ctr"/>
           <a:lstStyle/>
           <a:p>
-            <a:pPr indent="0" marL="0">
+            <a:pPr marL="0" indent="0">
               <a:buNone/>
             </a:pPr>
             <a:r>
@@ -19552,7 +19600,7 @@
           <a:bodyPr wrap="square" rtlCol="0" anchor="ctr"/>
           <a:lstStyle/>
           <a:p>
-            <a:pPr indent="0" marL="0">
+            <a:pPr marL="0" indent="0">
               <a:buNone/>
             </a:pPr>
             <a:r>
@@ -19591,7 +19639,7 @@
           <a:bodyPr wrap="square" rtlCol="0" anchor="ctr"/>
           <a:lstStyle/>
           <a:p>
-            <a:pPr indent="0" marL="0">
+            <a:pPr marL="0" indent="0">
               <a:buNone/>
             </a:pPr>
             <a:r>
@@ -19630,7 +19678,7 @@
           <a:bodyPr wrap="square" rtlCol="0" anchor="ctr"/>
           <a:lstStyle/>
           <a:p>
-            <a:pPr indent="0" marL="0">
+            <a:pPr marL="0" indent="0">
               <a:buNone/>
             </a:pPr>
             <a:r>
@@ -19734,7 +19782,7 @@
           <a:bodyPr wrap="square" rtlCol="0" anchor="ctr"/>
           <a:lstStyle/>
           <a:p>
-            <a:pPr indent="0" marL="0">
+            <a:pPr marL="0" indent="0">
               <a:buNone/>
             </a:pPr>
             <a:r>
@@ -19822,7 +19870,7 @@
           <a:bodyPr wrap="square" rtlCol="0" anchor="ctr"/>
           <a:lstStyle/>
           <a:p>
-            <a:pPr algn="ctr" indent="0" marL="0">
+            <a:pPr marL="0" indent="0" algn="ctr">
               <a:buNone/>
             </a:pPr>
             <a:r>
@@ -19861,7 +19909,7 @@
           <a:bodyPr wrap="square" rtlCol="0" anchor="ctr"/>
           <a:lstStyle/>
           <a:p>
-            <a:pPr algn="ctr" indent="0" marL="0">
+            <a:pPr marL="0" indent="0" algn="ctr">
               <a:buNone/>
             </a:pPr>
             <a:r>
@@ -19900,7 +19948,7 @@
           <a:bodyPr wrap="square" rtlCol="0" anchor="ctr"/>
           <a:lstStyle/>
           <a:p>
-            <a:pPr indent="0" marL="0">
+            <a:pPr marL="0" indent="0">
               <a:buNone/>
             </a:pPr>
             <a:r>
@@ -19939,7 +19987,7 @@
           <a:bodyPr wrap="square" rtlCol="0" anchor="ctr"/>
           <a:lstStyle/>
           <a:p>
-            <a:pPr indent="0" marL="0">
+            <a:pPr marL="0" indent="0">
               <a:buNone/>
             </a:pPr>
             <a:r>
@@ -19978,7 +20026,7 @@
           <a:bodyPr wrap="square" rtlCol="0" anchor="ctr"/>
           <a:lstStyle/>
           <a:p>
-            <a:pPr indent="0" marL="0">
+            <a:pPr marL="0" indent="0">
               <a:buNone/>
             </a:pPr>
             <a:r>
@@ -20061,7 +20109,7 @@
           <a:bodyPr wrap="square" rtlCol="0" anchor="ctr"/>
           <a:lstStyle/>
           <a:p>
-            <a:pPr indent="0" marL="0">
+            <a:pPr marL="0" indent="0">
               <a:buNone/>
             </a:pPr>
             <a:r>
@@ -20100,7 +20148,7 @@
           <a:bodyPr wrap="square" rtlCol="0" anchor="ctr"/>
           <a:lstStyle/>
           <a:p>
-            <a:pPr indent="0" marL="0">
+            <a:pPr marL="0" indent="0">
               <a:buNone/>
             </a:pPr>
             <a:r>
@@ -20139,7 +20187,7 @@
           <a:bodyPr wrap="square" rtlCol="0" anchor="ctr"/>
           <a:lstStyle/>
           <a:p>
-            <a:pPr indent="0" marL="0">
+            <a:pPr marL="0" indent="0">
               <a:buNone/>
             </a:pPr>
             <a:r>
@@ -20178,7 +20226,7 @@
           <a:bodyPr wrap="square" rtlCol="0" anchor="ctr"/>
           <a:lstStyle/>
           <a:p>
-            <a:pPr indent="0" marL="0">
+            <a:pPr marL="0" indent="0">
               <a:buNone/>
             </a:pPr>
             <a:r>
@@ -20217,7 +20265,7 @@
           <a:bodyPr wrap="square" rtlCol="0" anchor="ctr"/>
           <a:lstStyle/>
           <a:p>
-            <a:pPr indent="0" marL="0">
+            <a:pPr marL="0" indent="0">
               <a:buNone/>
             </a:pPr>
             <a:r>
@@ -20256,7 +20304,7 @@
           <a:bodyPr wrap="square" rtlCol="0" anchor="ctr"/>
           <a:lstStyle/>
           <a:p>
-            <a:pPr indent="0" marL="0">
+            <a:pPr marL="0" indent="0">
               <a:buNone/>
             </a:pPr>
             <a:r>
@@ -20295,7 +20343,7 @@
           <a:bodyPr wrap="square" rtlCol="0" anchor="ctr"/>
           <a:lstStyle/>
           <a:p>
-            <a:pPr indent="0" marL="0">
+            <a:pPr marL="0" indent="0">
               <a:buNone/>
             </a:pPr>
             <a:r>
@@ -20334,7 +20382,7 @@
           <a:bodyPr wrap="square" rtlCol="0" anchor="ctr"/>
           <a:lstStyle/>
           <a:p>
-            <a:pPr indent="0" marL="0">
+            <a:pPr marL="0" indent="0">
               <a:buNone/>
             </a:pPr>
             <a:r>
@@ -20373,7 +20421,7 @@
           <a:bodyPr wrap="square" rtlCol="0" anchor="ctr"/>
           <a:lstStyle/>
           <a:p>
-            <a:pPr indent="0" marL="0">
+            <a:pPr marL="0" indent="0">
               <a:buNone/>
             </a:pPr>
             <a:r>
@@ -20477,7 +20525,7 @@
           <a:bodyPr wrap="square" rtlCol="0" anchor="ctr"/>
           <a:lstStyle/>
           <a:p>
-            <a:pPr indent="0" marL="0">
+            <a:pPr marL="0" indent="0">
               <a:buNone/>
             </a:pPr>
             <a:r>
@@ -20516,7 +20564,7 @@
           <a:bodyPr wrap="square" rtlCol="0" anchor="ctr"/>
           <a:lstStyle/>
           <a:p>
-            <a:pPr indent="0" marL="0">
+            <a:pPr marL="0" indent="0">
               <a:buNone/>
             </a:pPr>
             <a:r>
@@ -20582,7 +20630,7 @@
           <a:bodyPr wrap="square" rtlCol="0" anchor="ctr"/>
           <a:lstStyle/>
           <a:p>
-            <a:pPr algn="ctr" indent="0" marL="0">
+            <a:pPr marL="0" indent="0" algn="ctr">
               <a:buNone/>
             </a:pPr>
             <a:r>
@@ -20618,7 +20666,7 @@
           <a:bodyPr wrap="square" rtlCol="0" anchor="ctr"/>
           <a:lstStyle/>
           <a:p>
-            <a:pPr algn="ctr" indent="0" marL="0">
+            <a:pPr marL="0" indent="0" algn="ctr">
               <a:buNone/>
             </a:pPr>
             <a:r>
@@ -20657,7 +20705,7 @@
           <a:bodyPr wrap="square" rtlCol="0" anchor="ctr"/>
           <a:lstStyle/>
           <a:p>
-            <a:pPr algn="ctr" indent="0" marL="0">
+            <a:pPr marL="0" indent="0" algn="ctr">
               <a:buNone/>
             </a:pPr>
             <a:r>
@@ -20674,7 +20722,7 @@
             <a:endParaRPr lang="en-US" sz="1000" dirty="0"/>
           </a:p>
           <a:p>
-            <a:pPr algn="ctr" indent="0" marL="0">
+            <a:pPr marL="0" indent="0" algn="ctr">
               <a:buNone/>
             </a:pPr>
             <a:r>
@@ -20691,7 +20739,7 @@
             <a:endParaRPr lang="en-US" sz="1000" dirty="0"/>
           </a:p>
           <a:p>
-            <a:pPr algn="ctr" indent="0" marL="0">
+            <a:pPr marL="0" indent="0" algn="ctr">
               <a:buNone/>
             </a:pPr>
             <a:r>
@@ -20757,7 +20805,7 @@
           <a:bodyPr wrap="square" rtlCol="0" anchor="ctr"/>
           <a:lstStyle/>
           <a:p>
-            <a:pPr algn="ctr" indent="0" marL="0">
+            <a:pPr marL="0" indent="0" algn="ctr">
               <a:buNone/>
             </a:pPr>
             <a:r>
@@ -20793,7 +20841,7 @@
           <a:bodyPr wrap="square" rtlCol="0" anchor="ctr"/>
           <a:lstStyle/>
           <a:p>
-            <a:pPr algn="ctr" indent="0" marL="0">
+            <a:pPr marL="0" indent="0" algn="ctr">
               <a:buNone/>
             </a:pPr>
             <a:r>
@@ -20832,7 +20880,7 @@
           <a:bodyPr wrap="square" rtlCol="0" anchor="ctr"/>
           <a:lstStyle/>
           <a:p>
-            <a:pPr algn="ctr" indent="0" marL="0">
+            <a:pPr marL="0" indent="0" algn="ctr">
               <a:buNone/>
             </a:pPr>
             <a:r>
@@ -20849,7 +20897,7 @@
             <a:endParaRPr lang="en-US" sz="1000" dirty="0"/>
           </a:p>
           <a:p>
-            <a:pPr algn="ctr" indent="0" marL="0">
+            <a:pPr marL="0" indent="0" algn="ctr">
               <a:buNone/>
             </a:pPr>
             <a:r>
@@ -20915,7 +20963,7 @@
           <a:bodyPr wrap="square" rtlCol="0" anchor="ctr"/>
           <a:lstStyle/>
           <a:p>
-            <a:pPr algn="ctr" indent="0" marL="0">
+            <a:pPr marL="0" indent="0" algn="ctr">
               <a:buNone/>
             </a:pPr>
             <a:r>
@@ -20951,7 +20999,7 @@
           <a:bodyPr wrap="square" rtlCol="0" anchor="ctr"/>
           <a:lstStyle/>
           <a:p>
-            <a:pPr algn="ctr" indent="0" marL="0">
+            <a:pPr marL="0" indent="0" algn="ctr">
               <a:buNone/>
             </a:pPr>
             <a:r>
@@ -20990,7 +21038,7 @@
           <a:bodyPr wrap="square" rtlCol="0" anchor="ctr"/>
           <a:lstStyle/>
           <a:p>
-            <a:pPr algn="ctr" indent="0" marL="0">
+            <a:pPr marL="0" indent="0" algn="ctr">
               <a:buNone/>
             </a:pPr>
             <a:r>
@@ -21007,7 +21055,7 @@
             <a:endParaRPr lang="en-US" sz="1000" dirty="0"/>
           </a:p>
           <a:p>
-            <a:pPr algn="ctr" indent="0" marL="0">
+            <a:pPr marL="0" indent="0" algn="ctr">
               <a:buNone/>
             </a:pPr>
             <a:r>
@@ -21046,7 +21094,7 @@
           <a:bodyPr wrap="square" rtlCol="0" anchor="ctr"/>
           <a:lstStyle/>
           <a:p>
-            <a:pPr indent="0" marL="0">
+            <a:pPr marL="0" indent="0">
               <a:buNone/>
             </a:pPr>
             <a:r>
@@ -21085,7 +21133,7 @@
           <a:bodyPr wrap="square" rtlCol="0" anchor="ctr"/>
           <a:lstStyle/>
           <a:p>
-            <a:pPr indent="0" marL="0">
+            <a:pPr marL="0" indent="0">
               <a:buNone/>
             </a:pPr>
             <a:r>
@@ -21124,7 +21172,7 @@
           <a:bodyPr wrap="square" rtlCol="0" anchor="ctr"/>
           <a:lstStyle/>
           <a:p>
-            <a:pPr indent="0" marL="0">
+            <a:pPr marL="0" indent="0">
               <a:buNone/>
             </a:pPr>
             <a:r>
@@ -21163,7 +21211,7 @@
           <a:bodyPr wrap="square" rtlCol="0" anchor="ctr"/>
           <a:lstStyle/>
           <a:p>
-            <a:pPr indent="0" marL="0">
+            <a:pPr marL="0" indent="0">
               <a:buNone/>
             </a:pPr>
             <a:r>
@@ -21202,7 +21250,7 @@
           <a:bodyPr wrap="square" rtlCol="0" anchor="ctr"/>
           <a:lstStyle/>
           <a:p>
-            <a:pPr indent="0" marL="0">
+            <a:pPr marL="0" indent="0">
               <a:buNone/>
             </a:pPr>
             <a:r>
@@ -21241,7 +21289,7 @@
           <a:bodyPr wrap="square" rtlCol="0" anchor="ctr"/>
           <a:lstStyle/>
           <a:p>
-            <a:pPr indent="0" marL="0">
+            <a:pPr marL="0" indent="0">
               <a:buNone/>
             </a:pPr>
             <a:r>
@@ -21345,7 +21393,7 @@
           <a:bodyPr wrap="square" rtlCol="0" anchor="ctr"/>
           <a:lstStyle/>
           <a:p>
-            <a:pPr indent="0" marL="0">
+            <a:pPr marL="0" indent="0">
               <a:buNone/>
             </a:pPr>
             <a:r>
@@ -21431,7 +21479,7 @@
           <a:bodyPr wrap="square" rtlCol="0" anchor="ctr"/>
           <a:lstStyle/>
           <a:p>
-            <a:pPr indent="0" marL="0">
+            <a:pPr marL="0" indent="0">
               <a:buNone/>
             </a:pPr>
             <a:r>
@@ -21492,7 +21540,7 @@
           <a:bodyPr wrap="square" rtlCol="0" anchor="ctr"/>
           <a:lstStyle/>
           <a:p>
-            <a:pPr algn="ctr" indent="0" marL="0">
+            <a:pPr marL="0" indent="0" algn="ctr">
               <a:buNone/>
             </a:pPr>
             <a:r>
@@ -21553,7 +21601,7 @@
           <a:bodyPr wrap="square" rtlCol="0" anchor="ctr"/>
           <a:lstStyle/>
           <a:p>
-            <a:pPr indent="0" marL="0">
+            <a:pPr marL="0" indent="0">
               <a:buNone/>
             </a:pPr>
             <a:r>
@@ -21570,13 +21618,13 @@
             <a:endParaRPr lang="en-US" sz="1000" dirty="0"/>
           </a:p>
           <a:p>
-            <a:pPr indent="0" marL="0">
+            <a:pPr marL="0" indent="0">
               <a:buNone/>
             </a:pPr>
             <a:endParaRPr lang="en-US" sz="1000" dirty="0"/>
           </a:p>
           <a:p>
-            <a:pPr indent="0" marL="0">
+            <a:pPr marL="0" indent="0">
               <a:buNone/>
             </a:pPr>
             <a:r>
@@ -21593,13 +21641,13 @@
             <a:endParaRPr lang="en-US" sz="1000" dirty="0"/>
           </a:p>
           <a:p>
-            <a:pPr indent="0" marL="0">
+            <a:pPr marL="0" indent="0">
               <a:buNone/>
             </a:pPr>
             <a:endParaRPr lang="en-US" sz="1000" dirty="0"/>
           </a:p>
           <a:p>
-            <a:pPr indent="0" marL="0">
+            <a:pPr marL="0" indent="0">
               <a:buNone/>
             </a:pPr>
             <a:r>
@@ -21660,7 +21708,7 @@
           <a:bodyPr wrap="square" rtlCol="0" anchor="ctr"/>
           <a:lstStyle/>
           <a:p>
-            <a:pPr algn="ctr" indent="0" marL="0">
+            <a:pPr marL="0" indent="0" algn="ctr">
               <a:buNone/>
             </a:pPr>
             <a:r>
@@ -21726,7 +21774,7 @@
           <a:bodyPr wrap="square" rtlCol="0" anchor="ctr"/>
           <a:lstStyle/>
           <a:p>
-            <a:pPr indent="0" marL="0">
+            <a:pPr marL="0" indent="0">
               <a:buNone/>
             </a:pPr>
             <a:r>
@@ -21787,7 +21835,7 @@
           <a:bodyPr wrap="square" rtlCol="0" anchor="ctr"/>
           <a:lstStyle/>
           <a:p>
-            <a:pPr algn="ctr" indent="0" marL="0">
+            <a:pPr marL="0" indent="0" algn="ctr">
               <a:buNone/>
             </a:pPr>
             <a:r>
@@ -21823,7 +21871,7 @@
           <a:bodyPr wrap="square" rtlCol="0" anchor="ctr"/>
           <a:lstStyle/>
           <a:p>
-            <a:pPr indent="0" marL="0">
+            <a:pPr marL="0" indent="0">
               <a:buNone/>
             </a:pPr>
             <a:r>
@@ -21862,7 +21910,7 @@
           <a:bodyPr wrap="square" rtlCol="0" anchor="ctr"/>
           <a:lstStyle/>
           <a:p>
-            <a:pPr indent="0" marL="0">
+            <a:pPr marL="0" indent="0">
               <a:buNone/>
             </a:pPr>
             <a:r>
@@ -21901,7 +21949,7 @@
           <a:bodyPr wrap="square" rtlCol="0" anchor="ctr"/>
           <a:lstStyle/>
           <a:p>
-            <a:pPr indent="0" marL="0">
+            <a:pPr marL="0" indent="0">
               <a:buNone/>
             </a:pPr>
             <a:r>
@@ -21940,7 +21988,7 @@
           <a:bodyPr wrap="square" rtlCol="0" anchor="ctr"/>
           <a:lstStyle/>
           <a:p>
-            <a:pPr indent="0" marL="0">
+            <a:pPr marL="0" indent="0">
               <a:buNone/>
             </a:pPr>
             <a:r>
@@ -21979,7 +22027,7 @@
           <a:bodyPr wrap="square" rtlCol="0" anchor="ctr"/>
           <a:lstStyle/>
           <a:p>
-            <a:pPr indent="0" marL="0">
+            <a:pPr marL="0" indent="0">
               <a:buNone/>
             </a:pPr>
             <a:r>
@@ -22018,7 +22066,7 @@
           <a:bodyPr wrap="square" rtlCol="0" anchor="ctr"/>
           <a:lstStyle/>
           <a:p>
-            <a:pPr indent="0" marL="0">
+            <a:pPr marL="0" indent="0">
               <a:buNone/>
             </a:pPr>
             <a:r>
@@ -22057,7 +22105,7 @@
           <a:bodyPr wrap="square" rtlCol="0" anchor="ctr"/>
           <a:lstStyle/>
           <a:p>
-            <a:pPr indent="0" marL="0">
+            <a:pPr marL="0" indent="0">
               <a:buNone/>
             </a:pPr>
             <a:r>
@@ -22096,7 +22144,7 @@
           <a:bodyPr wrap="square" rtlCol="0" anchor="ctr"/>
           <a:lstStyle/>
           <a:p>
-            <a:pPr indent="0" marL="0">
+            <a:pPr marL="0" indent="0">
               <a:buNone/>
             </a:pPr>
             <a:r>
@@ -22135,7 +22183,7 @@
           <a:bodyPr wrap="square" rtlCol="0" anchor="ctr"/>
           <a:lstStyle/>
           <a:p>
-            <a:pPr indent="0" marL="0">
+            <a:pPr marL="0" indent="0">
               <a:buNone/>
             </a:pPr>
             <a:r>
@@ -22174,7 +22222,7 @@
           <a:bodyPr wrap="square" rtlCol="0" anchor="ctr"/>
           <a:lstStyle/>
           <a:p>
-            <a:pPr indent="0" marL="0">
+            <a:pPr marL="0" indent="0">
               <a:buNone/>
             </a:pPr>
             <a:r>
@@ -22213,7 +22261,7 @@
           <a:bodyPr wrap="square" rtlCol="0" anchor="ctr"/>
           <a:lstStyle/>
           <a:p>
-            <a:pPr indent="0" marL="0">
+            <a:pPr marL="0" indent="0">
               <a:buNone/>
             </a:pPr>
             <a:r>
@@ -22252,7 +22300,7 @@
           <a:bodyPr wrap="square" rtlCol="0" anchor="ctr"/>
           <a:lstStyle/>
           <a:p>
-            <a:pPr indent="0" marL="0">
+            <a:pPr marL="0" indent="0">
               <a:buNone/>
             </a:pPr>
             <a:r>
@@ -22291,7 +22339,7 @@
           <a:bodyPr wrap="square" rtlCol="0" anchor="ctr"/>
           <a:lstStyle/>
           <a:p>
-            <a:pPr indent="0" marL="0">
+            <a:pPr marL="0" indent="0">
               <a:buNone/>
             </a:pPr>
             <a:r>
@@ -22610,4 +22658,299 @@
     </a:ext>
   </a:extLst>
 </a:theme>
+</file>
+
+<file path=ppt/theme/theme2.xml><?xml version="1.0" encoding="utf-8"?>
+<a:theme xmlns:a="http://schemas.openxmlformats.org/drawingml/2006/main" name="Thème Office">
+  <a:themeElements>
+    <a:clrScheme name="Office">
+      <a:dk1>
+        <a:sysClr val="windowText" lastClr="000000"/>
+      </a:dk1>
+      <a:lt1>
+        <a:sysClr val="window" lastClr="FFFFFF"/>
+      </a:lt1>
+      <a:dk2>
+        <a:srgbClr val="44546A"/>
+      </a:dk2>
+      <a:lt2>
+        <a:srgbClr val="E7E6E6"/>
+      </a:lt2>
+      <a:accent1>
+        <a:srgbClr val="4472C4"/>
+      </a:accent1>
+      <a:accent2>
+        <a:srgbClr val="ED7D31"/>
+      </a:accent2>
+      <a:accent3>
+        <a:srgbClr val="A5A5A5"/>
+      </a:accent3>
+      <a:accent4>
+        <a:srgbClr val="FFC000"/>
+      </a:accent4>
+      <a:accent5>
+        <a:srgbClr val="5B9BD5"/>
+      </a:accent5>
+      <a:accent6>
+        <a:srgbClr val="70AD47"/>
+      </a:accent6>
+      <a:hlink>
+        <a:srgbClr val="0563C1"/>
+      </a:hlink>
+      <a:folHlink>
+        <a:srgbClr val="954F72"/>
+      </a:folHlink>
+    </a:clrScheme>
+    <a:fontScheme name="Office">
+      <a:majorFont>
+        <a:latin typeface="Calibri Light" panose="020F0302020204030204"/>
+        <a:ea typeface=""/>
+        <a:cs typeface=""/>
+        <a:font script="Jpan" typeface="游ゴシック Light"/>
+        <a:font script="Hang" typeface="맑은 고딕"/>
+        <a:font script="Hans" typeface="等线 Light"/>
+        <a:font script="Hant" typeface="新細明體"/>
+        <a:font script="Arab" typeface="Times New Roman"/>
+        <a:font script="Hebr" typeface="Times New Roman"/>
+        <a:font script="Thai" typeface="Angsana New"/>
+        <a:font script="Ethi" typeface="Nyala"/>
+        <a:font script="Beng" typeface="Vrinda"/>
+        <a:font script="Gujr" typeface="Shruti"/>
+        <a:font script="Khmr" typeface="MoolBoran"/>
+        <a:font script="Knda" typeface="Tunga"/>
+        <a:font script="Guru" typeface="Raavi"/>
+        <a:font script="Cans" typeface="Euphemia"/>
+        <a:font script="Cher" typeface="Plantagenet Cherokee"/>
+        <a:font script="Yiii" typeface="Microsoft Yi Baiti"/>
+        <a:font script="Tibt" typeface="Microsoft Himalaya"/>
+        <a:font script="Thaa" typeface="MV Boli"/>
+        <a:font script="Deva" typeface="Mangal"/>
+        <a:font script="Telu" typeface="Gautami"/>
+        <a:font script="Taml" typeface="Latha"/>
+        <a:font script="Syrc" typeface="Estrangelo Edessa"/>
+        <a:font script="Orya" typeface="Kalinga"/>
+        <a:font script="Mlym" typeface="Kartika"/>
+        <a:font script="Laoo" typeface="DokChampa"/>
+        <a:font script="Sinh" typeface="Iskoola Pota"/>
+        <a:font script="Mong" typeface="Mongolian Baiti"/>
+        <a:font script="Viet" typeface="Times New Roman"/>
+        <a:font script="Uigh" typeface="Microsoft Uighur"/>
+        <a:font script="Geor" typeface="Sylfaen"/>
+        <a:font script="Armn" typeface="Arial"/>
+        <a:font script="Bugi" typeface="Leelawadee UI"/>
+        <a:font script="Bopo" typeface="Microsoft JhengHei"/>
+        <a:font script="Java" typeface="Javanese Text"/>
+        <a:font script="Lisu" typeface="Segoe UI"/>
+        <a:font script="Mymr" typeface="Myanmar Text"/>
+        <a:font script="Nkoo" typeface="Ebrima"/>
+        <a:font script="Olck" typeface="Nirmala UI"/>
+        <a:font script="Osma" typeface="Ebrima"/>
+        <a:font script="Phag" typeface="Phagspa"/>
+        <a:font script="Syrn" typeface="Estrangelo Edessa"/>
+        <a:font script="Syrj" typeface="Estrangelo Edessa"/>
+        <a:font script="Syre" typeface="Estrangelo Edessa"/>
+        <a:font script="Sora" typeface="Nirmala UI"/>
+        <a:font script="Tale" typeface="Microsoft Tai Le"/>
+        <a:font script="Talu" typeface="Microsoft New Tai Lue"/>
+        <a:font script="Tfng" typeface="Ebrima"/>
+      </a:majorFont>
+      <a:minorFont>
+        <a:latin typeface="Calibri" panose="020F0502020204030204"/>
+        <a:ea typeface=""/>
+        <a:cs typeface=""/>
+        <a:font script="Jpan" typeface="游ゴシック"/>
+        <a:font script="Hang" typeface="맑은 고딕"/>
+        <a:font script="Hans" typeface="等线"/>
+        <a:font script="Hant" typeface="新細明體"/>
+        <a:font script="Arab" typeface="Arial"/>
+        <a:font script="Hebr" typeface="Arial"/>
+        <a:font script="Thai" typeface="Cordia New"/>
+        <a:font script="Ethi" typeface="Nyala"/>
+        <a:font script="Beng" typeface="Vrinda"/>
+        <a:font script="Gujr" typeface="Shruti"/>
+        <a:font script="Khmr" typeface="DaunPenh"/>
+        <a:font script="Knda" typeface="Tunga"/>
+        <a:font script="Guru" typeface="Raavi"/>
+        <a:font script="Cans" typeface="Euphemia"/>
+        <a:font script="Cher" typeface="Plantagenet Cherokee"/>
+        <a:font script="Yiii" typeface="Microsoft Yi Baiti"/>
+        <a:font script="Tibt" typeface="Microsoft Himalaya"/>
+        <a:font script="Thaa" typeface="MV Boli"/>
+        <a:font script="Deva" typeface="Mangal"/>
+        <a:font script="Telu" typeface="Gautami"/>
+        <a:font script="Taml" typeface="Latha"/>
+        <a:font script="Syrc" typeface="Estrangelo Edessa"/>
+        <a:font script="Orya" typeface="Kalinga"/>
+        <a:font script="Mlym" typeface="Kartika"/>
+        <a:font script="Laoo" typeface="DokChampa"/>
+        <a:font script="Sinh" typeface="Iskoola Pota"/>
+        <a:font script="Mong" typeface="Mongolian Baiti"/>
+        <a:font script="Viet" typeface="Arial"/>
+        <a:font script="Uigh" typeface="Microsoft Uighur"/>
+        <a:font script="Geor" typeface="Sylfaen"/>
+        <a:font script="Armn" typeface="Arial"/>
+        <a:font script="Bugi" typeface="Leelawadee UI"/>
+        <a:font script="Bopo" typeface="Microsoft JhengHei"/>
+        <a:font script="Java" typeface="Javanese Text"/>
+        <a:font script="Lisu" typeface="Segoe UI"/>
+        <a:font script="Mymr" typeface="Myanmar Text"/>
+        <a:font script="Nkoo" typeface="Ebrima"/>
+        <a:font script="Olck" typeface="Nirmala UI"/>
+        <a:font script="Osma" typeface="Ebrima"/>
+        <a:font script="Phag" typeface="Phagspa"/>
+        <a:font script="Syrn" typeface="Estrangelo Edessa"/>
+        <a:font script="Syrj" typeface="Estrangelo Edessa"/>
+        <a:font script="Syre" typeface="Estrangelo Edessa"/>
+        <a:font script="Sora" typeface="Nirmala UI"/>
+        <a:font script="Tale" typeface="Microsoft Tai Le"/>
+        <a:font script="Talu" typeface="Microsoft New Tai Lue"/>
+        <a:font script="Tfng" typeface="Ebrima"/>
+      </a:minorFont>
+    </a:fontScheme>
+    <a:fmtScheme name="Office">
+      <a:fillStyleLst>
+        <a:solidFill>
+          <a:schemeClr val="phClr"/>
+        </a:solidFill>
+        <a:gradFill rotWithShape="1">
+          <a:gsLst>
+            <a:gs pos="0">
+              <a:schemeClr val="phClr">
+                <a:lumMod val="110000"/>
+                <a:satMod val="105000"/>
+                <a:tint val="67000"/>
+              </a:schemeClr>
+            </a:gs>
+            <a:gs pos="50000">
+              <a:schemeClr val="phClr">
+                <a:lumMod val="105000"/>
+                <a:satMod val="103000"/>
+                <a:tint val="73000"/>
+              </a:schemeClr>
+            </a:gs>
+            <a:gs pos="100000">
+              <a:schemeClr val="phClr">
+                <a:lumMod val="105000"/>
+                <a:satMod val="109000"/>
+                <a:tint val="81000"/>
+              </a:schemeClr>
+            </a:gs>
+          </a:gsLst>
+          <a:lin ang="5400000" scaled="0"/>
+        </a:gradFill>
+        <a:gradFill rotWithShape="1">
+          <a:gsLst>
+            <a:gs pos="0">
+              <a:schemeClr val="phClr">
+                <a:satMod val="103000"/>
+                <a:lumMod val="102000"/>
+                <a:tint val="94000"/>
+              </a:schemeClr>
+            </a:gs>
+            <a:gs pos="50000">
+              <a:schemeClr val="phClr">
+                <a:satMod val="110000"/>
+                <a:lumMod val="100000"/>
+                <a:shade val="100000"/>
+              </a:schemeClr>
+            </a:gs>
+            <a:gs pos="100000">
+              <a:schemeClr val="phClr">
+                <a:lumMod val="99000"/>
+                <a:satMod val="120000"/>
+                <a:shade val="78000"/>
+              </a:schemeClr>
+            </a:gs>
+          </a:gsLst>
+          <a:lin ang="5400000" scaled="0"/>
+        </a:gradFill>
+      </a:fillStyleLst>
+      <a:lnStyleLst>
+        <a:ln w="6350" cap="flat" cmpd="sng" algn="ctr">
+          <a:solidFill>
+            <a:schemeClr val="phClr"/>
+          </a:solidFill>
+          <a:prstDash val="solid"/>
+          <a:miter lim="800000"/>
+        </a:ln>
+        <a:ln w="12700" cap="flat" cmpd="sng" algn="ctr">
+          <a:solidFill>
+            <a:schemeClr val="phClr"/>
+          </a:solidFill>
+          <a:prstDash val="solid"/>
+          <a:miter lim="800000"/>
+        </a:ln>
+        <a:ln w="19050" cap="flat" cmpd="sng" algn="ctr">
+          <a:solidFill>
+            <a:schemeClr val="phClr"/>
+          </a:solidFill>
+          <a:prstDash val="solid"/>
+          <a:miter lim="800000"/>
+        </a:ln>
+      </a:lnStyleLst>
+      <a:effectStyleLst>
+        <a:effectStyle>
+          <a:effectLst/>
+        </a:effectStyle>
+        <a:effectStyle>
+          <a:effectLst/>
+        </a:effectStyle>
+        <a:effectStyle>
+          <a:effectLst>
+            <a:outerShdw blurRad="57150" dist="19050" dir="5400000" algn="ctr" rotWithShape="0">
+              <a:srgbClr val="000000">
+                <a:alpha val="63000"/>
+              </a:srgbClr>
+            </a:outerShdw>
+          </a:effectLst>
+        </a:effectStyle>
+      </a:effectStyleLst>
+      <a:bgFillStyleLst>
+        <a:solidFill>
+          <a:schemeClr val="phClr"/>
+        </a:solidFill>
+        <a:solidFill>
+          <a:schemeClr val="phClr">
+            <a:tint val="95000"/>
+            <a:satMod val="170000"/>
+          </a:schemeClr>
+        </a:solidFill>
+        <a:gradFill rotWithShape="1">
+          <a:gsLst>
+            <a:gs pos="0">
+              <a:schemeClr val="phClr">
+                <a:tint val="93000"/>
+                <a:satMod val="150000"/>
+                <a:shade val="98000"/>
+                <a:lumMod val="102000"/>
+              </a:schemeClr>
+            </a:gs>
+            <a:gs pos="50000">
+              <a:schemeClr val="phClr">
+                <a:tint val="98000"/>
+                <a:satMod val="130000"/>
+                <a:shade val="90000"/>
+                <a:lumMod val="103000"/>
+              </a:schemeClr>
+            </a:gs>
+            <a:gs pos="100000">
+              <a:schemeClr val="phClr">
+                <a:shade val="63000"/>
+                <a:satMod val="120000"/>
+              </a:schemeClr>
+            </a:gs>
+          </a:gsLst>
+          <a:lin ang="5400000" scaled="0"/>
+        </a:gradFill>
+      </a:bgFillStyleLst>
+    </a:fmtScheme>
+  </a:themeElements>
+  <a:objectDefaults/>
+  <a:extraClrSchemeLst/>
+  <a:extLst>
+    <a:ext uri="{05A4C25C-085E-4340-85A3-A5531E510DB2}">
+      <thm15:themeFamily xmlns:thm15="http://schemas.microsoft.com/office/thememl/2012/main" name="Office Theme" id="{62F939B6-93AF-4DB8-9C6B-D6C7DFDC589F}" vid="{4A3C46E8-61CC-4603-A589-7422A47A8E4A}"/>
+    </a:ext>
+  </a:extLst>
+</a:theme>
 </file>